--- a/usman/AI_ML_Visual_Guide.pptx
+++ b/usman/AI_ML_Visual_Guide.pptx
@@ -27,6 +27,10 @@
     <p:sldId id="275" r:id="rId26"/>
     <p:sldId id="276" r:id="rId27"/>
     <p:sldId id="277" r:id="rId28"/>
+    <p:sldId id="278" r:id="rId29"/>
+    <p:sldId id="279" r:id="rId30"/>
+    <p:sldId id="280" r:id="rId31"/>
+    <p:sldId id="281" r:id="rId32"/>
   </p:sldIdLst>
   <p:sldSz cx="12191695" cy="6858000" type="screen4x3"/>
   <p:notesSz cx="6858000" cy="9144000"/>
@@ -14282,6 +14286,4118 @@
             </a:pPr>
             <a:r>
               <a:t>Memorized, can't generalize</a:t>
+            </a:r>
+          </a:p>
+        </p:txBody>
+      </p:sp>
+    </p:spTree>
+  </p:cSld>
+  <p:clrMapOvr>
+    <a:masterClrMapping/>
+  </p:clrMapOvr>
+</p:sld>
+</file>
+
+<file path=ppt/slides/slide23.xml><?xml version="1.0" encoding="utf-8"?>
+<p:sld xmlns:a="http://schemas.openxmlformats.org/drawingml/2006/main" xmlns:p="http://schemas.openxmlformats.org/presentationml/2006/main" xmlns:r="http://schemas.openxmlformats.org/officeDocument/2006/relationships">
+  <p:cSld>
+    <p:bg>
+      <p:bgPr>
+        <a:solidFill>
+          <a:srgbClr val="1E1E28"/>
+        </a:solidFill>
+        <a:effectLst/>
+      </p:bgPr>
+    </p:bg>
+    <p:spTree>
+      <p:nvGrpSpPr>
+        <p:cNvPr id="1" name=""/>
+        <p:cNvGrpSpPr/>
+        <p:nvPr/>
+      </p:nvGrpSpPr>
+      <p:grpSpPr/>
+      <p:sp>
+        <p:nvSpPr>
+          <p:cNvPr id="2" name="TextBox 1"/>
+          <p:cNvSpPr txBox="1"/>
+          <p:nvPr/>
+        </p:nvSpPr>
+        <p:spPr>
+          <a:xfrm>
+            <a:off x="457200" y="274320"/>
+            <a:ext cx="10972800" cy="731520"/>
+          </a:xfrm>
+          <a:prstGeom prst="rect">
+            <a:avLst/>
+          </a:prstGeom>
+          <a:noFill/>
+        </p:spPr>
+        <p:txBody>
+          <a:bodyPr wrap="square">
+            <a:spAutoFit/>
+          </a:bodyPr>
+          <a:lstStyle/>
+          <a:p>
+            <a:pPr algn="l">
+              <a:defRPr sz="2600" b="1">
+                <a:solidFill>
+                  <a:srgbClr val="0096FF"/>
+                </a:solidFill>
+              </a:defRPr>
+            </a:pPr>
+            <a:r>
+              <a:t>12. Problem Understanding &amp; Model Selection</a:t>
+            </a:r>
+          </a:p>
+        </p:txBody>
+      </p:sp>
+      <p:sp>
+        <p:nvSpPr>
+          <p:cNvPr id="3" name="TextBox 2"/>
+          <p:cNvSpPr txBox="1"/>
+          <p:nvPr/>
+        </p:nvSpPr>
+        <p:spPr>
+          <a:xfrm>
+            <a:off x="457200" y="914400"/>
+            <a:ext cx="10972800" cy="457200"/>
+          </a:xfrm>
+          <a:prstGeom prst="rect">
+            <a:avLst/>
+          </a:prstGeom>
+          <a:noFill/>
+        </p:spPr>
+        <p:txBody>
+          <a:bodyPr wrap="square">
+            <a:spAutoFit/>
+          </a:bodyPr>
+          <a:lstStyle/>
+          <a:p>
+            <a:pPr algn="ctr">
+              <a:defRPr sz="1600" b="0">
+                <a:solidFill>
+                  <a:srgbClr val="C8C8D2"/>
+                </a:solidFill>
+              </a:defRPr>
+            </a:pPr>
+            <a:r>
+              <a:t>Ask these 5 questions BEFORE touching any model</a:t>
+            </a:r>
+          </a:p>
+        </p:txBody>
+      </p:sp>
+      <p:sp>
+        <p:nvSpPr>
+          <p:cNvPr id="4" name="Rectangle 3"/>
+          <p:cNvSpPr/>
+          <p:nvPr/>
+        </p:nvSpPr>
+        <p:spPr>
+          <a:xfrm>
+            <a:off x="274320" y="1554480"/>
+            <a:ext cx="2148840" cy="3474720"/>
+          </a:xfrm>
+          <a:prstGeom prst="rect">
+            <a:avLst/>
+          </a:prstGeom>
+          <a:solidFill>
+            <a:srgbClr val="2D2D3C"/>
+          </a:solidFill>
+          <a:ln>
+            <a:noFill/>
+          </a:ln>
+        </p:spPr>
+        <p:style>
+          <a:lnRef idx="1">
+            <a:schemeClr val="accent1"/>
+          </a:lnRef>
+          <a:fillRef idx="3">
+            <a:schemeClr val="accent1"/>
+          </a:fillRef>
+          <a:effectRef idx="2">
+            <a:schemeClr val="accent1"/>
+          </a:effectRef>
+          <a:fontRef idx="minor">
+            <a:schemeClr val="lt1"/>
+          </a:fontRef>
+        </p:style>
+        <p:txBody>
+          <a:bodyPr rtlCol="0" anchor="ctr"/>
+          <a:lstStyle/>
+          <a:p>
+            <a:pPr algn="ctr"/>
+          </a:p>
+        </p:txBody>
+      </p:sp>
+      <p:sp>
+        <p:nvSpPr>
+          <p:cNvPr id="5" name="TextBox 4"/>
+          <p:cNvSpPr txBox="1"/>
+          <p:nvPr/>
+        </p:nvSpPr>
+        <p:spPr>
+          <a:xfrm>
+            <a:off x="365760" y="1645920"/>
+            <a:ext cx="1965960" cy="365760"/>
+          </a:xfrm>
+          <a:prstGeom prst="rect">
+            <a:avLst/>
+          </a:prstGeom>
+          <a:noFill/>
+        </p:spPr>
+        <p:txBody>
+          <a:bodyPr wrap="square">
+            <a:spAutoFit/>
+          </a:bodyPr>
+          <a:lstStyle/>
+          <a:p>
+            <a:pPr algn="ctr">
+              <a:defRPr sz="1600" b="1">
+                <a:solidFill>
+                  <a:srgbClr val="00C864"/>
+                </a:solidFill>
+              </a:defRPr>
+            </a:pPr>
+            <a:r>
+              <a:t>1. GOAL?</a:t>
+            </a:r>
+          </a:p>
+        </p:txBody>
+      </p:sp>
+      <p:sp>
+        <p:nvSpPr>
+          <p:cNvPr id="6" name="TextBox 5"/>
+          <p:cNvSpPr txBox="1"/>
+          <p:nvPr/>
+        </p:nvSpPr>
+        <p:spPr>
+          <a:xfrm>
+            <a:off x="365760" y="2194560"/>
+            <a:ext cx="1965960" cy="914400"/>
+          </a:xfrm>
+          <a:prstGeom prst="rect">
+            <a:avLst/>
+          </a:prstGeom>
+          <a:noFill/>
+        </p:spPr>
+        <p:txBody>
+          <a:bodyPr wrap="square">
+            <a:spAutoFit/>
+          </a:bodyPr>
+          <a:lstStyle/>
+          <a:p>
+            <a:pPr algn="ctr">
+              <a:defRPr sz="1200" b="0">
+                <a:solidFill>
+                  <a:srgbClr val="FFFFFF"/>
+                </a:solidFill>
+              </a:defRPr>
+            </a:pPr>
+            <a:r>
+              <a:t>What am I trying</a:t>
+            </a:r>
+            <a:br/>
+            <a:r>
+              <a:t>to achieve?</a:t>
+            </a:r>
+          </a:p>
+        </p:txBody>
+      </p:sp>
+      <p:sp>
+        <p:nvSpPr>
+          <p:cNvPr id="7" name="TextBox 6"/>
+          <p:cNvSpPr txBox="1"/>
+          <p:nvPr/>
+        </p:nvSpPr>
+        <p:spPr>
+          <a:xfrm>
+            <a:off x="365760" y="3291840"/>
+            <a:ext cx="1965960" cy="1097280"/>
+          </a:xfrm>
+          <a:prstGeom prst="rect">
+            <a:avLst/>
+          </a:prstGeom>
+          <a:noFill/>
+        </p:spPr>
+        <p:txBody>
+          <a:bodyPr wrap="square">
+            <a:spAutoFit/>
+          </a:bodyPr>
+          <a:lstStyle/>
+          <a:p>
+            <a:pPr algn="ctr">
+              <a:defRPr sz="1100" b="0">
+                <a:solidFill>
+                  <a:srgbClr val="C8C8D2"/>
+                </a:solidFill>
+              </a:defRPr>
+            </a:pPr>
+            <a:r>
+              <a:t>Detect cheating</a:t>
+            </a:r>
+          </a:p>
+        </p:txBody>
+      </p:sp>
+      <p:sp>
+        <p:nvSpPr>
+          <p:cNvPr id="8" name="Rectangle 7"/>
+          <p:cNvSpPr/>
+          <p:nvPr/>
+        </p:nvSpPr>
+        <p:spPr>
+          <a:xfrm>
+            <a:off x="2606039" y="1554480"/>
+            <a:ext cx="2148840" cy="3474720"/>
+          </a:xfrm>
+          <a:prstGeom prst="rect">
+            <a:avLst/>
+          </a:prstGeom>
+          <a:solidFill>
+            <a:srgbClr val="2D2D3C"/>
+          </a:solidFill>
+          <a:ln>
+            <a:noFill/>
+          </a:ln>
+        </p:spPr>
+        <p:style>
+          <a:lnRef idx="1">
+            <a:schemeClr val="accent1"/>
+          </a:lnRef>
+          <a:fillRef idx="3">
+            <a:schemeClr val="accent1"/>
+          </a:fillRef>
+          <a:effectRef idx="2">
+            <a:schemeClr val="accent1"/>
+          </a:effectRef>
+          <a:fontRef idx="minor">
+            <a:schemeClr val="lt1"/>
+          </a:fontRef>
+        </p:style>
+        <p:txBody>
+          <a:bodyPr rtlCol="0" anchor="ctr"/>
+          <a:lstStyle/>
+          <a:p>
+            <a:pPr algn="ctr"/>
+          </a:p>
+        </p:txBody>
+      </p:sp>
+      <p:sp>
+        <p:nvSpPr>
+          <p:cNvPr id="9" name="TextBox 8"/>
+          <p:cNvSpPr txBox="1"/>
+          <p:nvPr/>
+        </p:nvSpPr>
+        <p:spPr>
+          <a:xfrm>
+            <a:off x="2697479" y="1645920"/>
+            <a:ext cx="1965960" cy="365760"/>
+          </a:xfrm>
+          <a:prstGeom prst="rect">
+            <a:avLst/>
+          </a:prstGeom>
+          <a:noFill/>
+        </p:spPr>
+        <p:txBody>
+          <a:bodyPr wrap="square">
+            <a:spAutoFit/>
+          </a:bodyPr>
+          <a:lstStyle/>
+          <a:p>
+            <a:pPr algn="ctr">
+              <a:defRPr sz="1600" b="1">
+                <a:solidFill>
+                  <a:srgbClr val="0096FF"/>
+                </a:solidFill>
+              </a:defRPr>
+            </a:pPr>
+            <a:r>
+              <a:t>2. DATA?</a:t>
+            </a:r>
+          </a:p>
+        </p:txBody>
+      </p:sp>
+      <p:sp>
+        <p:nvSpPr>
+          <p:cNvPr id="10" name="TextBox 9"/>
+          <p:cNvSpPr txBox="1"/>
+          <p:nvPr/>
+        </p:nvSpPr>
+        <p:spPr>
+          <a:xfrm>
+            <a:off x="2697479" y="2194560"/>
+            <a:ext cx="1965960" cy="914400"/>
+          </a:xfrm>
+          <a:prstGeom prst="rect">
+            <a:avLst/>
+          </a:prstGeom>
+          <a:noFill/>
+        </p:spPr>
+        <p:txBody>
+          <a:bodyPr wrap="square">
+            <a:spAutoFit/>
+          </a:bodyPr>
+          <a:lstStyle/>
+          <a:p>
+            <a:pPr algn="ctr">
+              <a:defRPr sz="1200" b="0">
+                <a:solidFill>
+                  <a:srgbClr val="FFFFFF"/>
+                </a:solidFill>
+              </a:defRPr>
+            </a:pPr>
+            <a:r>
+              <a:t>What type do</a:t>
+            </a:r>
+            <a:br/>
+            <a:r>
+              <a:t>I have?</a:t>
+            </a:r>
+          </a:p>
+        </p:txBody>
+      </p:sp>
+      <p:sp>
+        <p:nvSpPr>
+          <p:cNvPr id="11" name="TextBox 10"/>
+          <p:cNvSpPr txBox="1"/>
+          <p:nvPr/>
+        </p:nvSpPr>
+        <p:spPr>
+          <a:xfrm>
+            <a:off x="2697479" y="3291840"/>
+            <a:ext cx="1965960" cy="1097280"/>
+          </a:xfrm>
+          <a:prstGeom prst="rect">
+            <a:avLst/>
+          </a:prstGeom>
+          <a:noFill/>
+        </p:spPr>
+        <p:txBody>
+          <a:bodyPr wrap="square">
+            <a:spAutoFit/>
+          </a:bodyPr>
+          <a:lstStyle/>
+          <a:p>
+            <a:pPr algn="ctr">
+              <a:defRPr sz="1100" b="0">
+                <a:solidFill>
+                  <a:srgbClr val="C8C8D2"/>
+                </a:solidFill>
+              </a:defRPr>
+            </a:pPr>
+            <a:r>
+              <a:t>Labeled clips +</a:t>
+            </a:r>
+            <a:br/>
+            <a:r>
+              <a:t>live feeds</a:t>
+            </a:r>
+          </a:p>
+        </p:txBody>
+      </p:sp>
+      <p:sp>
+        <p:nvSpPr>
+          <p:cNvPr id="12" name="Rectangle 11"/>
+          <p:cNvSpPr/>
+          <p:nvPr/>
+        </p:nvSpPr>
+        <p:spPr>
+          <a:xfrm>
+            <a:off x="4937759" y="1554480"/>
+            <a:ext cx="2148840" cy="3474720"/>
+          </a:xfrm>
+          <a:prstGeom prst="rect">
+            <a:avLst/>
+          </a:prstGeom>
+          <a:solidFill>
+            <a:srgbClr val="2D2D3C"/>
+          </a:solidFill>
+          <a:ln>
+            <a:noFill/>
+          </a:ln>
+        </p:spPr>
+        <p:style>
+          <a:lnRef idx="1">
+            <a:schemeClr val="accent1"/>
+          </a:lnRef>
+          <a:fillRef idx="3">
+            <a:schemeClr val="accent1"/>
+          </a:fillRef>
+          <a:effectRef idx="2">
+            <a:schemeClr val="accent1"/>
+          </a:effectRef>
+          <a:fontRef idx="minor">
+            <a:schemeClr val="lt1"/>
+          </a:fontRef>
+        </p:style>
+        <p:txBody>
+          <a:bodyPr rtlCol="0" anchor="ctr"/>
+          <a:lstStyle/>
+          <a:p>
+            <a:pPr algn="ctr"/>
+          </a:p>
+        </p:txBody>
+      </p:sp>
+      <p:sp>
+        <p:nvSpPr>
+          <p:cNvPr id="13" name="TextBox 12"/>
+          <p:cNvSpPr txBox="1"/>
+          <p:nvPr/>
+        </p:nvSpPr>
+        <p:spPr>
+          <a:xfrm>
+            <a:off x="5029199" y="1645920"/>
+            <a:ext cx="1965960" cy="365760"/>
+          </a:xfrm>
+          <a:prstGeom prst="rect">
+            <a:avLst/>
+          </a:prstGeom>
+          <a:noFill/>
+        </p:spPr>
+        <p:txBody>
+          <a:bodyPr wrap="square">
+            <a:spAutoFit/>
+          </a:bodyPr>
+          <a:lstStyle/>
+          <a:p>
+            <a:pPr algn="ctr">
+              <a:defRPr sz="1600" b="1">
+                <a:solidFill>
+                  <a:srgbClr val="FFA500"/>
+                </a:solidFill>
+              </a:defRPr>
+            </a:pPr>
+            <a:r>
+              <a:t>3. ANSWER?</a:t>
+            </a:r>
+          </a:p>
+        </p:txBody>
+      </p:sp>
+      <p:sp>
+        <p:nvSpPr>
+          <p:cNvPr id="14" name="TextBox 13"/>
+          <p:cNvSpPr txBox="1"/>
+          <p:nvPr/>
+        </p:nvSpPr>
+        <p:spPr>
+          <a:xfrm>
+            <a:off x="5029199" y="2194560"/>
+            <a:ext cx="1965960" cy="914400"/>
+          </a:xfrm>
+          <a:prstGeom prst="rect">
+            <a:avLst/>
+          </a:prstGeom>
+          <a:noFill/>
+        </p:spPr>
+        <p:txBody>
+          <a:bodyPr wrap="square">
+            <a:spAutoFit/>
+          </a:bodyPr>
+          <a:lstStyle/>
+          <a:p>
+            <a:pPr algn="ctr">
+              <a:defRPr sz="1200" b="0">
+                <a:solidFill>
+                  <a:srgbClr val="FFFFFF"/>
+                </a:solidFill>
+              </a:defRPr>
+            </a:pPr>
+            <a:r>
+              <a:t>Word or Number</a:t>
+            </a:r>
+            <a:br/>
+            <a:r>
+              <a:t>or Strategy?</a:t>
+            </a:r>
+          </a:p>
+        </p:txBody>
+      </p:sp>
+      <p:sp>
+        <p:nvSpPr>
+          <p:cNvPr id="15" name="TextBox 14"/>
+          <p:cNvSpPr txBox="1"/>
+          <p:nvPr/>
+        </p:nvSpPr>
+        <p:spPr>
+          <a:xfrm>
+            <a:off x="5029199" y="3291840"/>
+            <a:ext cx="1965960" cy="1097280"/>
+          </a:xfrm>
+          <a:prstGeom prst="rect">
+            <a:avLst/>
+          </a:prstGeom>
+          <a:noFill/>
+        </p:spPr>
+        <p:txBody>
+          <a:bodyPr wrap="square">
+            <a:spAutoFit/>
+          </a:bodyPr>
+          <a:lstStyle/>
+          <a:p>
+            <a:pPr algn="ctr">
+              <a:defRPr sz="1100" b="0">
+                <a:solidFill>
+                  <a:srgbClr val="C8C8D2"/>
+                </a:solidFill>
+              </a:defRPr>
+            </a:pPr>
+            <a:r>
+              <a:t>Word = cheating</a:t>
+            </a:r>
+            <a:br/>
+            <a:r>
+              <a:t>or normal</a:t>
+            </a:r>
+          </a:p>
+        </p:txBody>
+      </p:sp>
+      <p:sp>
+        <p:nvSpPr>
+          <p:cNvPr id="16" name="Rectangle 15"/>
+          <p:cNvSpPr/>
+          <p:nvPr/>
+        </p:nvSpPr>
+        <p:spPr>
+          <a:xfrm>
+            <a:off x="7269479" y="1554480"/>
+            <a:ext cx="2148840" cy="3474720"/>
+          </a:xfrm>
+          <a:prstGeom prst="rect">
+            <a:avLst/>
+          </a:prstGeom>
+          <a:solidFill>
+            <a:srgbClr val="2D2D3C"/>
+          </a:solidFill>
+          <a:ln>
+            <a:noFill/>
+          </a:ln>
+        </p:spPr>
+        <p:style>
+          <a:lnRef idx="1">
+            <a:schemeClr val="accent1"/>
+          </a:lnRef>
+          <a:fillRef idx="3">
+            <a:schemeClr val="accent1"/>
+          </a:fillRef>
+          <a:effectRef idx="2">
+            <a:schemeClr val="accent1"/>
+          </a:effectRef>
+          <a:fontRef idx="minor">
+            <a:schemeClr val="lt1"/>
+          </a:fontRef>
+        </p:style>
+        <p:txBody>
+          <a:bodyPr rtlCol="0" anchor="ctr"/>
+          <a:lstStyle/>
+          <a:p>
+            <a:pPr algn="ctr"/>
+          </a:p>
+        </p:txBody>
+      </p:sp>
+      <p:sp>
+        <p:nvSpPr>
+          <p:cNvPr id="17" name="TextBox 16"/>
+          <p:cNvSpPr txBox="1"/>
+          <p:nvPr/>
+        </p:nvSpPr>
+        <p:spPr>
+          <a:xfrm>
+            <a:off x="7360919" y="1645920"/>
+            <a:ext cx="1965960" cy="365760"/>
+          </a:xfrm>
+          <a:prstGeom prst="rect">
+            <a:avLst/>
+          </a:prstGeom>
+          <a:noFill/>
+        </p:spPr>
+        <p:txBody>
+          <a:bodyPr wrap="square">
+            <a:spAutoFit/>
+          </a:bodyPr>
+          <a:lstStyle/>
+          <a:p>
+            <a:pPr algn="ctr">
+              <a:defRPr sz="1600" b="1">
+                <a:solidFill>
+                  <a:srgbClr val="B464FF"/>
+                </a:solidFill>
+              </a:defRPr>
+            </a:pPr>
+            <a:r>
+              <a:t>4. SIZE?</a:t>
+            </a:r>
+          </a:p>
+        </p:txBody>
+      </p:sp>
+      <p:sp>
+        <p:nvSpPr>
+          <p:cNvPr id="18" name="TextBox 17"/>
+          <p:cNvSpPr txBox="1"/>
+          <p:nvPr/>
+        </p:nvSpPr>
+        <p:spPr>
+          <a:xfrm>
+            <a:off x="7360919" y="2194560"/>
+            <a:ext cx="1965960" cy="914400"/>
+          </a:xfrm>
+          <a:prstGeom prst="rect">
+            <a:avLst/>
+          </a:prstGeom>
+          <a:noFill/>
+        </p:spPr>
+        <p:txBody>
+          <a:bodyPr wrap="square">
+            <a:spAutoFit/>
+          </a:bodyPr>
+          <a:lstStyle/>
+          <a:p>
+            <a:pPr algn="ctr">
+              <a:defRPr sz="1200" b="0">
+                <a:solidFill>
+                  <a:srgbClr val="FFFFFF"/>
+                </a:solidFill>
+              </a:defRPr>
+            </a:pPr>
+            <a:r>
+              <a:t>How much data</a:t>
+            </a:r>
+            <a:br/>
+            <a:r>
+              <a:t>do I have?</a:t>
+            </a:r>
+          </a:p>
+        </p:txBody>
+      </p:sp>
+      <p:sp>
+        <p:nvSpPr>
+          <p:cNvPr id="19" name="TextBox 18"/>
+          <p:cNvSpPr txBox="1"/>
+          <p:nvPr/>
+        </p:nvSpPr>
+        <p:spPr>
+          <a:xfrm>
+            <a:off x="7360919" y="3291840"/>
+            <a:ext cx="1965960" cy="1097280"/>
+          </a:xfrm>
+          <a:prstGeom prst="rect">
+            <a:avLst/>
+          </a:prstGeom>
+          <a:noFill/>
+        </p:spPr>
+        <p:txBody>
+          <a:bodyPr wrap="square">
+            <a:spAutoFit/>
+          </a:bodyPr>
+          <a:lstStyle/>
+          <a:p>
+            <a:pPr algn="ctr">
+              <a:defRPr sz="1100" b="0">
+                <a:solidFill>
+                  <a:srgbClr val="C8C8D2"/>
+                </a:solidFill>
+              </a:defRPr>
+            </a:pPr>
+            <a:r>
+              <a:t>10K+ clips =</a:t>
+            </a:r>
+            <a:br/>
+            <a:r>
+              <a:t>DL territory</a:t>
+            </a:r>
+          </a:p>
+        </p:txBody>
+      </p:sp>
+      <p:sp>
+        <p:nvSpPr>
+          <p:cNvPr id="20" name="Rectangle 19"/>
+          <p:cNvSpPr/>
+          <p:nvPr/>
+        </p:nvSpPr>
+        <p:spPr>
+          <a:xfrm>
+            <a:off x="9601200" y="1554480"/>
+            <a:ext cx="2148840" cy="3474720"/>
+          </a:xfrm>
+          <a:prstGeom prst="rect">
+            <a:avLst/>
+          </a:prstGeom>
+          <a:solidFill>
+            <a:srgbClr val="2D2D3C"/>
+          </a:solidFill>
+          <a:ln>
+            <a:noFill/>
+          </a:ln>
+        </p:spPr>
+        <p:style>
+          <a:lnRef idx="1">
+            <a:schemeClr val="accent1"/>
+          </a:lnRef>
+          <a:fillRef idx="3">
+            <a:schemeClr val="accent1"/>
+          </a:fillRef>
+          <a:effectRef idx="2">
+            <a:schemeClr val="accent1"/>
+          </a:effectRef>
+          <a:fontRef idx="minor">
+            <a:schemeClr val="lt1"/>
+          </a:fontRef>
+        </p:style>
+        <p:txBody>
+          <a:bodyPr rtlCol="0" anchor="ctr"/>
+          <a:lstStyle/>
+          <a:p>
+            <a:pPr algn="ctr"/>
+          </a:p>
+        </p:txBody>
+      </p:sp>
+      <p:sp>
+        <p:nvSpPr>
+          <p:cNvPr id="21" name="TextBox 20"/>
+          <p:cNvSpPr txBox="1"/>
+          <p:nvPr/>
+        </p:nvSpPr>
+        <p:spPr>
+          <a:xfrm>
+            <a:off x="9692640" y="1645920"/>
+            <a:ext cx="1965960" cy="365760"/>
+          </a:xfrm>
+          <a:prstGeom prst="rect">
+            <a:avLst/>
+          </a:prstGeom>
+          <a:noFill/>
+        </p:spPr>
+        <p:txBody>
+          <a:bodyPr wrap="square">
+            <a:spAutoFit/>
+          </a:bodyPr>
+          <a:lstStyle/>
+          <a:p>
+            <a:pPr algn="ctr">
+              <a:defRPr sz="1600" b="1">
+                <a:solidFill>
+                  <a:srgbClr val="FF5050"/>
+                </a:solidFill>
+              </a:defRPr>
+            </a:pPr>
+            <a:r>
+              <a:t>5. SPEED?</a:t>
+            </a:r>
+          </a:p>
+        </p:txBody>
+      </p:sp>
+      <p:sp>
+        <p:nvSpPr>
+          <p:cNvPr id="22" name="TextBox 21"/>
+          <p:cNvSpPr txBox="1"/>
+          <p:nvPr/>
+        </p:nvSpPr>
+        <p:spPr>
+          <a:xfrm>
+            <a:off x="9692640" y="2194560"/>
+            <a:ext cx="1965960" cy="914400"/>
+          </a:xfrm>
+          <a:prstGeom prst="rect">
+            <a:avLst/>
+          </a:prstGeom>
+          <a:noFill/>
+        </p:spPr>
+        <p:txBody>
+          <a:bodyPr wrap="square">
+            <a:spAutoFit/>
+          </a:bodyPr>
+          <a:lstStyle/>
+          <a:p>
+            <a:pPr algn="ctr">
+              <a:defRPr sz="1200" b="0">
+                <a:solidFill>
+                  <a:srgbClr val="FFFFFF"/>
+                </a:solidFill>
+              </a:defRPr>
+            </a:pPr>
+            <a:r>
+              <a:t>Real-time</a:t>
+            </a:r>
+            <a:br/>
+            <a:r>
+              <a:t>needed?</a:t>
+            </a:r>
+          </a:p>
+        </p:txBody>
+      </p:sp>
+      <p:sp>
+        <p:nvSpPr>
+          <p:cNvPr id="23" name="TextBox 22"/>
+          <p:cNvSpPr txBox="1"/>
+          <p:nvPr/>
+        </p:nvSpPr>
+        <p:spPr>
+          <a:xfrm>
+            <a:off x="9692640" y="3291840"/>
+            <a:ext cx="1965960" cy="1097280"/>
+          </a:xfrm>
+          <a:prstGeom prst="rect">
+            <a:avLst/>
+          </a:prstGeom>
+          <a:noFill/>
+        </p:spPr>
+        <p:txBody>
+          <a:bodyPr wrap="square">
+            <a:spAutoFit/>
+          </a:bodyPr>
+          <a:lstStyle/>
+          <a:p>
+            <a:pPr algn="ctr">
+              <a:defRPr sz="1100" b="0">
+                <a:solidFill>
+                  <a:srgbClr val="C8C8D2"/>
+                </a:solidFill>
+              </a:defRPr>
+            </a:pPr>
+            <a:r>
+              <a:t>YES = fast</a:t>
+            </a:r>
+            <a:br/>
+            <a:r>
+              <a:t>models only</a:t>
+            </a:r>
+          </a:p>
+        </p:txBody>
+      </p:sp>
+      <p:sp>
+        <p:nvSpPr>
+          <p:cNvPr id="24" name="Rectangle 23"/>
+          <p:cNvSpPr/>
+          <p:nvPr/>
+        </p:nvSpPr>
+        <p:spPr>
+          <a:xfrm>
+            <a:off x="457200" y="5303520"/>
+            <a:ext cx="10972800" cy="731520"/>
+          </a:xfrm>
+          <a:prstGeom prst="rect">
+            <a:avLst/>
+          </a:prstGeom>
+          <a:solidFill>
+            <a:srgbClr val="2D2D3C"/>
+          </a:solidFill>
+          <a:ln>
+            <a:noFill/>
+          </a:ln>
+        </p:spPr>
+        <p:style>
+          <a:lnRef idx="1">
+            <a:schemeClr val="accent1"/>
+          </a:lnRef>
+          <a:fillRef idx="3">
+            <a:schemeClr val="accent1"/>
+          </a:fillRef>
+          <a:effectRef idx="2">
+            <a:schemeClr val="accent1"/>
+          </a:effectRef>
+          <a:fontRef idx="minor">
+            <a:schemeClr val="lt1"/>
+          </a:fontRef>
+        </p:style>
+        <p:txBody>
+          <a:bodyPr rtlCol="0" anchor="ctr"/>
+          <a:lstStyle/>
+          <a:p>
+            <a:pPr algn="ctr"/>
+          </a:p>
+        </p:txBody>
+      </p:sp>
+      <p:sp>
+        <p:nvSpPr>
+          <p:cNvPr id="25" name="TextBox 24"/>
+          <p:cNvSpPr txBox="1"/>
+          <p:nvPr/>
+        </p:nvSpPr>
+        <p:spPr>
+          <a:xfrm>
+            <a:off x="640080" y="5394960"/>
+            <a:ext cx="10607040" cy="457200"/>
+          </a:xfrm>
+          <a:prstGeom prst="rect">
+            <a:avLst/>
+          </a:prstGeom>
+          <a:noFill/>
+        </p:spPr>
+        <p:txBody>
+          <a:bodyPr wrap="square">
+            <a:spAutoFit/>
+          </a:bodyPr>
+          <a:lstStyle/>
+          <a:p>
+            <a:pPr algn="ctr">
+              <a:defRPr sz="1400" b="1">
+                <a:solidFill>
+                  <a:srgbClr val="FFDC32"/>
+                </a:solidFill>
+              </a:defRPr>
+            </a:pPr>
+            <a:r>
+              <a:t>Wrong model = weeks of wasted work. Right questions = right model = faster results!</a:t>
+            </a:r>
+          </a:p>
+        </p:txBody>
+      </p:sp>
+    </p:spTree>
+  </p:cSld>
+  <p:clrMapOvr>
+    <a:masterClrMapping/>
+  </p:clrMapOvr>
+</p:sld>
+</file>
+
+<file path=ppt/slides/slide24.xml><?xml version="1.0" encoding="utf-8"?>
+<p:sld xmlns:a="http://schemas.openxmlformats.org/drawingml/2006/main" xmlns:p="http://schemas.openxmlformats.org/presentationml/2006/main" xmlns:r="http://schemas.openxmlformats.org/officeDocument/2006/relationships">
+  <p:cSld>
+    <p:bg>
+      <p:bgPr>
+        <a:solidFill>
+          <a:srgbClr val="1E1E28"/>
+        </a:solidFill>
+        <a:effectLst/>
+      </p:bgPr>
+    </p:bg>
+    <p:spTree>
+      <p:nvGrpSpPr>
+        <p:cNvPr id="1" name=""/>
+        <p:cNvGrpSpPr/>
+        <p:nvPr/>
+      </p:nvGrpSpPr>
+      <p:grpSpPr/>
+      <p:sp>
+        <p:nvSpPr>
+          <p:cNvPr id="2" name="TextBox 1"/>
+          <p:cNvSpPr txBox="1"/>
+          <p:nvPr/>
+        </p:nvSpPr>
+        <p:spPr>
+          <a:xfrm>
+            <a:off x="457200" y="274320"/>
+            <a:ext cx="10972800" cy="731520"/>
+          </a:xfrm>
+          <a:prstGeom prst="rect">
+            <a:avLst/>
+          </a:prstGeom>
+          <a:noFill/>
+        </p:spPr>
+        <p:txBody>
+          <a:bodyPr wrap="square">
+            <a:spAutoFit/>
+          </a:bodyPr>
+          <a:lstStyle/>
+          <a:p>
+            <a:pPr algn="l">
+              <a:defRPr sz="2600" b="1">
+                <a:solidFill>
+                  <a:srgbClr val="0096FF"/>
+                </a:solidFill>
+              </a:defRPr>
+            </a:pPr>
+            <a:r>
+              <a:t>Model Selection Decision Flowchart</a:t>
+            </a:r>
+          </a:p>
+        </p:txBody>
+      </p:sp>
+      <p:sp>
+        <p:nvSpPr>
+          <p:cNvPr id="3" name="Rectangle 2"/>
+          <p:cNvSpPr/>
+          <p:nvPr/>
+        </p:nvSpPr>
+        <p:spPr>
+          <a:xfrm>
+            <a:off x="4114800" y="1097280"/>
+            <a:ext cx="3931920" cy="640080"/>
+          </a:xfrm>
+          <a:prstGeom prst="rect">
+            <a:avLst/>
+          </a:prstGeom>
+          <a:solidFill>
+            <a:srgbClr val="3C3C50"/>
+          </a:solidFill>
+          <a:ln>
+            <a:noFill/>
+          </a:ln>
+        </p:spPr>
+        <p:style>
+          <a:lnRef idx="1">
+            <a:schemeClr val="accent1"/>
+          </a:lnRef>
+          <a:fillRef idx="3">
+            <a:schemeClr val="accent1"/>
+          </a:fillRef>
+          <a:effectRef idx="2">
+            <a:schemeClr val="accent1"/>
+          </a:effectRef>
+          <a:fontRef idx="minor">
+            <a:schemeClr val="lt1"/>
+          </a:fontRef>
+        </p:style>
+        <p:txBody>
+          <a:bodyPr rtlCol="0" anchor="ctr"/>
+          <a:lstStyle/>
+          <a:p>
+            <a:pPr algn="ctr"/>
+          </a:p>
+        </p:txBody>
+      </p:sp>
+      <p:sp>
+        <p:nvSpPr>
+          <p:cNvPr id="4" name="TextBox 3"/>
+          <p:cNvSpPr txBox="1"/>
+          <p:nvPr/>
+        </p:nvSpPr>
+        <p:spPr>
+          <a:xfrm>
+            <a:off x="4206240" y="1143000"/>
+            <a:ext cx="3749039" cy="457200"/>
+          </a:xfrm>
+          <a:prstGeom prst="rect">
+            <a:avLst/>
+          </a:prstGeom>
+          <a:noFill/>
+        </p:spPr>
+        <p:txBody>
+          <a:bodyPr wrap="square">
+            <a:spAutoFit/>
+          </a:bodyPr>
+          <a:lstStyle/>
+          <a:p>
+            <a:pPr algn="ctr">
+              <a:defRPr sz="1400" b="1">
+                <a:solidFill>
+                  <a:srgbClr val="FFFFFF"/>
+                </a:solidFill>
+              </a:defRPr>
+            </a:pPr>
+            <a:r>
+              <a:t>Do I have LABELED data?</a:t>
+            </a:r>
+          </a:p>
+        </p:txBody>
+      </p:sp>
+      <p:sp>
+        <p:nvSpPr>
+          <p:cNvPr id="5" name="TextBox 4"/>
+          <p:cNvSpPr txBox="1"/>
+          <p:nvPr/>
+        </p:nvSpPr>
+        <p:spPr>
+          <a:xfrm>
+            <a:off x="2286000" y="1737360"/>
+            <a:ext cx="914400" cy="365760"/>
+          </a:xfrm>
+          <a:prstGeom prst="rect">
+            <a:avLst/>
+          </a:prstGeom>
+          <a:noFill/>
+        </p:spPr>
+        <p:txBody>
+          <a:bodyPr wrap="square">
+            <a:spAutoFit/>
+          </a:bodyPr>
+          <a:lstStyle/>
+          <a:p>
+            <a:pPr algn="ctr">
+              <a:defRPr sz="1300" b="1">
+                <a:solidFill>
+                  <a:srgbClr val="00C864"/>
+                </a:solidFill>
+              </a:defRPr>
+            </a:pPr>
+            <a:r>
+              <a:t>YES</a:t>
+            </a:r>
+          </a:p>
+        </p:txBody>
+      </p:sp>
+      <p:sp>
+        <p:nvSpPr>
+          <p:cNvPr id="6" name="Rectangle 5"/>
+          <p:cNvSpPr/>
+          <p:nvPr/>
+        </p:nvSpPr>
+        <p:spPr>
+          <a:xfrm>
+            <a:off x="1371600" y="2103120"/>
+            <a:ext cx="3200400" cy="548640"/>
+          </a:xfrm>
+          <a:prstGeom prst="rect">
+            <a:avLst/>
+          </a:prstGeom>
+          <a:solidFill>
+            <a:srgbClr val="324632"/>
+          </a:solidFill>
+          <a:ln>
+            <a:noFill/>
+          </a:ln>
+        </p:spPr>
+        <p:style>
+          <a:lnRef idx="1">
+            <a:schemeClr val="accent1"/>
+          </a:lnRef>
+          <a:fillRef idx="3">
+            <a:schemeClr val="accent1"/>
+          </a:fillRef>
+          <a:effectRef idx="2">
+            <a:schemeClr val="accent1"/>
+          </a:effectRef>
+          <a:fontRef idx="minor">
+            <a:schemeClr val="lt1"/>
+          </a:fontRef>
+        </p:style>
+        <p:txBody>
+          <a:bodyPr rtlCol="0" anchor="ctr"/>
+          <a:lstStyle/>
+          <a:p>
+            <a:pPr algn="ctr"/>
+          </a:p>
+        </p:txBody>
+      </p:sp>
+      <p:sp>
+        <p:nvSpPr>
+          <p:cNvPr id="7" name="TextBox 6"/>
+          <p:cNvSpPr txBox="1"/>
+          <p:nvPr/>
+        </p:nvSpPr>
+        <p:spPr>
+          <a:xfrm>
+            <a:off x="1463040" y="2148840"/>
+            <a:ext cx="3017520" cy="365760"/>
+          </a:xfrm>
+          <a:prstGeom prst="rect">
+            <a:avLst/>
+          </a:prstGeom>
+          <a:noFill/>
+        </p:spPr>
+        <p:txBody>
+          <a:bodyPr wrap="square">
+            <a:spAutoFit/>
+          </a:bodyPr>
+          <a:lstStyle/>
+          <a:p>
+            <a:pPr algn="ctr">
+              <a:defRPr sz="1200" b="0">
+                <a:solidFill>
+                  <a:srgbClr val="00C864"/>
+                </a:solidFill>
+              </a:defRPr>
+            </a:pPr>
+            <a:r>
+              <a:t>Answer = WORD?</a:t>
+            </a:r>
+          </a:p>
+        </p:txBody>
+      </p:sp>
+      <p:sp>
+        <p:nvSpPr>
+          <p:cNvPr id="8" name="Rectangle 7"/>
+          <p:cNvSpPr/>
+          <p:nvPr/>
+        </p:nvSpPr>
+        <p:spPr>
+          <a:xfrm>
+            <a:off x="274320" y="2834640"/>
+            <a:ext cx="2286000" cy="548640"/>
+          </a:xfrm>
+          <a:prstGeom prst="rect">
+            <a:avLst/>
+          </a:prstGeom>
+          <a:solidFill>
+            <a:srgbClr val="285028"/>
+          </a:solidFill>
+          <a:ln>
+            <a:noFill/>
+          </a:ln>
+        </p:spPr>
+        <p:style>
+          <a:lnRef idx="1">
+            <a:schemeClr val="accent1"/>
+          </a:lnRef>
+          <a:fillRef idx="3">
+            <a:schemeClr val="accent1"/>
+          </a:fillRef>
+          <a:effectRef idx="2">
+            <a:schemeClr val="accent1"/>
+          </a:effectRef>
+          <a:fontRef idx="minor">
+            <a:schemeClr val="lt1"/>
+          </a:fontRef>
+        </p:style>
+        <p:txBody>
+          <a:bodyPr rtlCol="0" anchor="ctr"/>
+          <a:lstStyle/>
+          <a:p>
+            <a:pPr algn="ctr"/>
+          </a:p>
+        </p:txBody>
+      </p:sp>
+      <p:sp>
+        <p:nvSpPr>
+          <p:cNvPr id="9" name="TextBox 8"/>
+          <p:cNvSpPr txBox="1"/>
+          <p:nvPr/>
+        </p:nvSpPr>
+        <p:spPr>
+          <a:xfrm>
+            <a:off x="365760" y="2880360"/>
+            <a:ext cx="2103120" cy="365760"/>
+          </a:xfrm>
+          <a:prstGeom prst="rect">
+            <a:avLst/>
+          </a:prstGeom>
+          <a:noFill/>
+        </p:spPr>
+        <p:txBody>
+          <a:bodyPr wrap="square">
+            <a:spAutoFit/>
+          </a:bodyPr>
+          <a:lstStyle/>
+          <a:p>
+            <a:pPr algn="ctr">
+              <a:defRPr sz="1200" b="1">
+                <a:solidFill>
+                  <a:srgbClr val="00C864"/>
+                </a:solidFill>
+              </a:defRPr>
+            </a:pPr>
+            <a:r>
+              <a:t>CLASSIFICATION</a:t>
+            </a:r>
+          </a:p>
+        </p:txBody>
+      </p:sp>
+      <p:sp>
+        <p:nvSpPr>
+          <p:cNvPr id="10" name="Rectangle 9"/>
+          <p:cNvSpPr/>
+          <p:nvPr/>
+        </p:nvSpPr>
+        <p:spPr>
+          <a:xfrm>
+            <a:off x="2926080" y="2834640"/>
+            <a:ext cx="2286000" cy="548640"/>
+          </a:xfrm>
+          <a:prstGeom prst="rect">
+            <a:avLst/>
+          </a:prstGeom>
+          <a:solidFill>
+            <a:srgbClr val="463C1E"/>
+          </a:solidFill>
+          <a:ln>
+            <a:noFill/>
+          </a:ln>
+        </p:spPr>
+        <p:style>
+          <a:lnRef idx="1">
+            <a:schemeClr val="accent1"/>
+          </a:lnRef>
+          <a:fillRef idx="3">
+            <a:schemeClr val="accent1"/>
+          </a:fillRef>
+          <a:effectRef idx="2">
+            <a:schemeClr val="accent1"/>
+          </a:effectRef>
+          <a:fontRef idx="minor">
+            <a:schemeClr val="lt1"/>
+          </a:fontRef>
+        </p:style>
+        <p:txBody>
+          <a:bodyPr rtlCol="0" anchor="ctr"/>
+          <a:lstStyle/>
+          <a:p>
+            <a:pPr algn="ctr"/>
+          </a:p>
+        </p:txBody>
+      </p:sp>
+      <p:sp>
+        <p:nvSpPr>
+          <p:cNvPr id="11" name="TextBox 10"/>
+          <p:cNvSpPr txBox="1"/>
+          <p:nvPr/>
+        </p:nvSpPr>
+        <p:spPr>
+          <a:xfrm>
+            <a:off x="3017520" y="2880360"/>
+            <a:ext cx="2103120" cy="365760"/>
+          </a:xfrm>
+          <a:prstGeom prst="rect">
+            <a:avLst/>
+          </a:prstGeom>
+          <a:noFill/>
+        </p:spPr>
+        <p:txBody>
+          <a:bodyPr wrap="square">
+            <a:spAutoFit/>
+          </a:bodyPr>
+          <a:lstStyle/>
+          <a:p>
+            <a:pPr algn="ctr">
+              <a:defRPr sz="1100" b="1">
+                <a:solidFill>
+                  <a:srgbClr val="FFA500"/>
+                </a:solidFill>
+              </a:defRPr>
+            </a:pPr>
+            <a:r>
+              <a:t>Answer = NUMBER?</a:t>
+            </a:r>
+            <a:br/>
+            <a:r>
+              <a:t>REGRESSION</a:t>
+            </a:r>
+          </a:p>
+        </p:txBody>
+      </p:sp>
+      <p:sp>
+        <p:nvSpPr>
+          <p:cNvPr id="12" name="TextBox 11"/>
+          <p:cNvSpPr txBox="1"/>
+          <p:nvPr/>
+        </p:nvSpPr>
+        <p:spPr>
+          <a:xfrm>
+            <a:off x="7772400" y="1737360"/>
+            <a:ext cx="914400" cy="365760"/>
+          </a:xfrm>
+          <a:prstGeom prst="rect">
+            <a:avLst/>
+          </a:prstGeom>
+          <a:noFill/>
+        </p:spPr>
+        <p:txBody>
+          <a:bodyPr wrap="square">
+            <a:spAutoFit/>
+          </a:bodyPr>
+          <a:lstStyle/>
+          <a:p>
+            <a:pPr algn="ctr">
+              <a:defRPr sz="1300" b="1">
+                <a:solidFill>
+                  <a:srgbClr val="FF5050"/>
+                </a:solidFill>
+              </a:defRPr>
+            </a:pPr>
+            <a:r>
+              <a:t>NO</a:t>
+            </a:r>
+          </a:p>
+        </p:txBody>
+      </p:sp>
+      <p:sp>
+        <p:nvSpPr>
+          <p:cNvPr id="13" name="Rectangle 12"/>
+          <p:cNvSpPr/>
+          <p:nvPr/>
+        </p:nvSpPr>
+        <p:spPr>
+          <a:xfrm>
+            <a:off x="6400800" y="2103120"/>
+            <a:ext cx="3200400" cy="548640"/>
+          </a:xfrm>
+          <a:prstGeom prst="rect">
+            <a:avLst/>
+          </a:prstGeom>
+          <a:solidFill>
+            <a:srgbClr val="462832"/>
+          </a:solidFill>
+          <a:ln>
+            <a:noFill/>
+          </a:ln>
+        </p:spPr>
+        <p:style>
+          <a:lnRef idx="1">
+            <a:schemeClr val="accent1"/>
+          </a:lnRef>
+          <a:fillRef idx="3">
+            <a:schemeClr val="accent1"/>
+          </a:fillRef>
+          <a:effectRef idx="2">
+            <a:schemeClr val="accent1"/>
+          </a:effectRef>
+          <a:fontRef idx="minor">
+            <a:schemeClr val="lt1"/>
+          </a:fontRef>
+        </p:style>
+        <p:txBody>
+          <a:bodyPr rtlCol="0" anchor="ctr"/>
+          <a:lstStyle/>
+          <a:p>
+            <a:pPr algn="ctr"/>
+          </a:p>
+        </p:txBody>
+      </p:sp>
+      <p:sp>
+        <p:nvSpPr>
+          <p:cNvPr id="14" name="TextBox 13"/>
+          <p:cNvSpPr txBox="1"/>
+          <p:nvPr/>
+        </p:nvSpPr>
+        <p:spPr>
+          <a:xfrm>
+            <a:off x="6492240" y="2148840"/>
+            <a:ext cx="3017520" cy="365760"/>
+          </a:xfrm>
+          <a:prstGeom prst="rect">
+            <a:avLst/>
+          </a:prstGeom>
+          <a:noFill/>
+        </p:spPr>
+        <p:txBody>
+          <a:bodyPr wrap="square">
+            <a:spAutoFit/>
+          </a:bodyPr>
+          <a:lstStyle/>
+          <a:p>
+            <a:pPr algn="ctr">
+              <a:defRPr sz="1200" b="0">
+                <a:solidFill>
+                  <a:srgbClr val="FF5050"/>
+                </a:solidFill>
+              </a:defRPr>
+            </a:pPr>
+            <a:r>
+              <a:t>Find groups or spot weird?</a:t>
+            </a:r>
+          </a:p>
+        </p:txBody>
+      </p:sp>
+      <p:sp>
+        <p:nvSpPr>
+          <p:cNvPr id="15" name="Rectangle 14"/>
+          <p:cNvSpPr/>
+          <p:nvPr/>
+        </p:nvSpPr>
+        <p:spPr>
+          <a:xfrm>
+            <a:off x="5760720" y="2834640"/>
+            <a:ext cx="2286000" cy="548640"/>
+          </a:xfrm>
+          <a:prstGeom prst="rect">
+            <a:avLst/>
+          </a:prstGeom>
+          <a:solidFill>
+            <a:srgbClr val="322846"/>
+          </a:solidFill>
+          <a:ln>
+            <a:noFill/>
+          </a:ln>
+        </p:spPr>
+        <p:style>
+          <a:lnRef idx="1">
+            <a:schemeClr val="accent1"/>
+          </a:lnRef>
+          <a:fillRef idx="3">
+            <a:schemeClr val="accent1"/>
+          </a:fillRef>
+          <a:effectRef idx="2">
+            <a:schemeClr val="accent1"/>
+          </a:effectRef>
+          <a:fontRef idx="minor">
+            <a:schemeClr val="lt1"/>
+          </a:fontRef>
+        </p:style>
+        <p:txBody>
+          <a:bodyPr rtlCol="0" anchor="ctr"/>
+          <a:lstStyle/>
+          <a:p>
+            <a:pPr algn="ctr"/>
+          </a:p>
+        </p:txBody>
+      </p:sp>
+      <p:sp>
+        <p:nvSpPr>
+          <p:cNvPr id="16" name="TextBox 15"/>
+          <p:cNvSpPr txBox="1"/>
+          <p:nvPr/>
+        </p:nvSpPr>
+        <p:spPr>
+          <a:xfrm>
+            <a:off x="5852160" y="2880360"/>
+            <a:ext cx="2103120" cy="365760"/>
+          </a:xfrm>
+          <a:prstGeom prst="rect">
+            <a:avLst/>
+          </a:prstGeom>
+          <a:noFill/>
+        </p:spPr>
+        <p:txBody>
+          <a:bodyPr wrap="square">
+            <a:spAutoFit/>
+          </a:bodyPr>
+          <a:lstStyle/>
+          <a:p>
+            <a:pPr algn="ctr">
+              <a:defRPr sz="1200" b="1">
+                <a:solidFill>
+                  <a:srgbClr val="B464FF"/>
+                </a:solidFill>
+              </a:defRPr>
+            </a:pPr>
+            <a:r>
+              <a:t>CLUSTERING</a:t>
+            </a:r>
+          </a:p>
+        </p:txBody>
+      </p:sp>
+      <p:sp>
+        <p:nvSpPr>
+          <p:cNvPr id="17" name="Rectangle 16"/>
+          <p:cNvSpPr/>
+          <p:nvPr/>
+        </p:nvSpPr>
+        <p:spPr>
+          <a:xfrm>
+            <a:off x="8412480" y="2834640"/>
+            <a:ext cx="2286000" cy="548640"/>
+          </a:xfrm>
+          <a:prstGeom prst="rect">
+            <a:avLst/>
+          </a:prstGeom>
+          <a:solidFill>
+            <a:srgbClr val="461E1E"/>
+          </a:solidFill>
+          <a:ln>
+            <a:noFill/>
+          </a:ln>
+        </p:spPr>
+        <p:style>
+          <a:lnRef idx="1">
+            <a:schemeClr val="accent1"/>
+          </a:lnRef>
+          <a:fillRef idx="3">
+            <a:schemeClr val="accent1"/>
+          </a:fillRef>
+          <a:effectRef idx="2">
+            <a:schemeClr val="accent1"/>
+          </a:effectRef>
+          <a:fontRef idx="minor">
+            <a:schemeClr val="lt1"/>
+          </a:fontRef>
+        </p:style>
+        <p:txBody>
+          <a:bodyPr rtlCol="0" anchor="ctr"/>
+          <a:lstStyle/>
+          <a:p>
+            <a:pPr algn="ctr"/>
+          </a:p>
+        </p:txBody>
+      </p:sp>
+      <p:sp>
+        <p:nvSpPr>
+          <p:cNvPr id="18" name="TextBox 17"/>
+          <p:cNvSpPr txBox="1"/>
+          <p:nvPr/>
+        </p:nvSpPr>
+        <p:spPr>
+          <a:xfrm>
+            <a:off x="8503920" y="2880360"/>
+            <a:ext cx="2103120" cy="365760"/>
+          </a:xfrm>
+          <a:prstGeom prst="rect">
+            <a:avLst/>
+          </a:prstGeom>
+          <a:noFill/>
+        </p:spPr>
+        <p:txBody>
+          <a:bodyPr wrap="square">
+            <a:spAutoFit/>
+          </a:bodyPr>
+          <a:lstStyle/>
+          <a:p>
+            <a:pPr algn="ctr">
+              <a:defRPr sz="1100" b="1">
+                <a:solidFill>
+                  <a:srgbClr val="FF5050"/>
+                </a:solidFill>
+              </a:defRPr>
+            </a:pPr>
+            <a:r>
+              <a:t>ANOMALY</a:t>
+            </a:r>
+            <a:br/>
+            <a:r>
+              <a:t>DETECTION</a:t>
+            </a:r>
+          </a:p>
+        </p:txBody>
+      </p:sp>
+      <p:sp>
+        <p:nvSpPr>
+          <p:cNvPr id="19" name="Rectangle 18"/>
+          <p:cNvSpPr/>
+          <p:nvPr/>
+        </p:nvSpPr>
+        <p:spPr>
+          <a:xfrm>
+            <a:off x="4114800" y="3657600"/>
+            <a:ext cx="3931920" cy="640080"/>
+          </a:xfrm>
+          <a:prstGeom prst="rect">
+            <a:avLst/>
+          </a:prstGeom>
+          <a:solidFill>
+            <a:srgbClr val="3C321E"/>
+          </a:solidFill>
+          <a:ln>
+            <a:noFill/>
+          </a:ln>
+        </p:spPr>
+        <p:style>
+          <a:lnRef idx="1">
+            <a:schemeClr val="accent1"/>
+          </a:lnRef>
+          <a:fillRef idx="3">
+            <a:schemeClr val="accent1"/>
+          </a:fillRef>
+          <a:effectRef idx="2">
+            <a:schemeClr val="accent1"/>
+          </a:effectRef>
+          <a:fontRef idx="minor">
+            <a:schemeClr val="lt1"/>
+          </a:fontRef>
+        </p:style>
+        <p:txBody>
+          <a:bodyPr rtlCol="0" anchor="ctr"/>
+          <a:lstStyle/>
+          <a:p>
+            <a:pPr algn="ctr"/>
+          </a:p>
+        </p:txBody>
+      </p:sp>
+      <p:sp>
+        <p:nvSpPr>
+          <p:cNvPr id="20" name="TextBox 19"/>
+          <p:cNvSpPr txBox="1"/>
+          <p:nvPr/>
+        </p:nvSpPr>
+        <p:spPr>
+          <a:xfrm>
+            <a:off x="4206240" y="3703320"/>
+            <a:ext cx="3749039" cy="457200"/>
+          </a:xfrm>
+          <a:prstGeom prst="rect">
+            <a:avLst/>
+          </a:prstGeom>
+          <a:noFill/>
+        </p:spPr>
+        <p:txBody>
+          <a:bodyPr wrap="square">
+            <a:spAutoFit/>
+          </a:bodyPr>
+          <a:lstStyle/>
+          <a:p>
+            <a:pPr algn="ctr">
+              <a:defRPr sz="1400" b="1">
+                <a:solidFill>
+                  <a:srgbClr val="FFA500"/>
+                </a:solidFill>
+              </a:defRPr>
+            </a:pPr>
+            <a:r>
+              <a:t>Goal + Feedback? -&gt; RL</a:t>
+            </a:r>
+          </a:p>
+        </p:txBody>
+      </p:sp>
+      <p:sp>
+        <p:nvSpPr>
+          <p:cNvPr id="21" name="Rectangle 20"/>
+          <p:cNvSpPr/>
+          <p:nvPr/>
+        </p:nvSpPr>
+        <p:spPr>
+          <a:xfrm>
+            <a:off x="457200" y="4572000"/>
+            <a:ext cx="10972800" cy="1371600"/>
+          </a:xfrm>
+          <a:prstGeom prst="rect">
+            <a:avLst/>
+          </a:prstGeom>
+          <a:solidFill>
+            <a:srgbClr val="2D2D3C"/>
+          </a:solidFill>
+          <a:ln>
+            <a:noFill/>
+          </a:ln>
+        </p:spPr>
+        <p:style>
+          <a:lnRef idx="1">
+            <a:schemeClr val="accent1"/>
+          </a:lnRef>
+          <a:fillRef idx="3">
+            <a:schemeClr val="accent1"/>
+          </a:fillRef>
+          <a:effectRef idx="2">
+            <a:schemeClr val="accent1"/>
+          </a:effectRef>
+          <a:fontRef idx="minor">
+            <a:schemeClr val="lt1"/>
+          </a:fontRef>
+        </p:style>
+        <p:txBody>
+          <a:bodyPr rtlCol="0" anchor="ctr"/>
+          <a:lstStyle/>
+          <a:p>
+            <a:pPr algn="ctr"/>
+          </a:p>
+        </p:txBody>
+      </p:sp>
+      <p:sp>
+        <p:nvSpPr>
+          <p:cNvPr id="22" name="TextBox 21"/>
+          <p:cNvSpPr txBox="1"/>
+          <p:nvPr/>
+        </p:nvSpPr>
+        <p:spPr>
+          <a:xfrm>
+            <a:off x="640080" y="4663440"/>
+            <a:ext cx="10607040" cy="365760"/>
+          </a:xfrm>
+          <a:prstGeom prst="rect">
+            <a:avLst/>
+          </a:prstGeom>
+          <a:noFill/>
+        </p:spPr>
+        <p:txBody>
+          <a:bodyPr wrap="square">
+            <a:spAutoFit/>
+          </a:bodyPr>
+          <a:lstStyle/>
+          <a:p>
+            <a:pPr algn="l">
+              <a:defRPr sz="1400" b="1">
+                <a:solidFill>
+                  <a:srgbClr val="FFDC32"/>
+                </a:solidFill>
+              </a:defRPr>
+            </a:pPr>
+            <a:r>
+              <a:t>Then check DATA SIZE:</a:t>
+            </a:r>
+          </a:p>
+        </p:txBody>
+      </p:sp>
+      <p:sp>
+        <p:nvSpPr>
+          <p:cNvPr id="23" name="TextBox 22"/>
+          <p:cNvSpPr txBox="1"/>
+          <p:nvPr/>
+        </p:nvSpPr>
+        <p:spPr>
+          <a:xfrm>
+            <a:off x="640080" y="5029200"/>
+            <a:ext cx="3200400" cy="731520"/>
+          </a:xfrm>
+          <a:prstGeom prst="rect">
+            <a:avLst/>
+          </a:prstGeom>
+          <a:noFill/>
+        </p:spPr>
+        <p:txBody>
+          <a:bodyPr wrap="square">
+            <a:spAutoFit/>
+          </a:bodyPr>
+          <a:lstStyle/>
+          <a:p>
+            <a:pPr algn="l">
+              <a:defRPr sz="1100" b="0">
+                <a:solidFill>
+                  <a:srgbClr val="00C864"/>
+                </a:solidFill>
+              </a:defRPr>
+            </a:pPr>
+            <a:r>
+              <a:t>&lt; 1,000 rows</a:t>
+            </a:r>
+            <a:br/>
+            <a:r>
+              <a:t>Simple models</a:t>
+            </a:r>
+            <a:br/>
+            <a:r>
+              <a:t>Logistic Reg, Tree</a:t>
+            </a:r>
+          </a:p>
+        </p:txBody>
+      </p:sp>
+      <p:sp>
+        <p:nvSpPr>
+          <p:cNvPr id="24" name="TextBox 23"/>
+          <p:cNvSpPr txBox="1"/>
+          <p:nvPr/>
+        </p:nvSpPr>
+        <p:spPr>
+          <a:xfrm>
+            <a:off x="4114800" y="5029200"/>
+            <a:ext cx="3200400" cy="731520"/>
+          </a:xfrm>
+          <a:prstGeom prst="rect">
+            <a:avLst/>
+          </a:prstGeom>
+          <a:noFill/>
+        </p:spPr>
+        <p:txBody>
+          <a:bodyPr wrap="square">
+            <a:spAutoFit/>
+          </a:bodyPr>
+          <a:lstStyle/>
+          <a:p>
+            <a:pPr algn="l">
+              <a:defRPr sz="1100" b="0">
+                <a:solidFill>
+                  <a:srgbClr val="FFA500"/>
+                </a:solidFill>
+              </a:defRPr>
+            </a:pPr>
+            <a:r>
+              <a:t>1K - 100K rows</a:t>
+            </a:r>
+            <a:br/>
+            <a:r>
+              <a:t>Medium models</a:t>
+            </a:r>
+            <a:br/>
+            <a:r>
+              <a:t>Random Forest, XGBoost</a:t>
+            </a:r>
+          </a:p>
+        </p:txBody>
+      </p:sp>
+      <p:sp>
+        <p:nvSpPr>
+          <p:cNvPr id="25" name="TextBox 24"/>
+          <p:cNvSpPr txBox="1"/>
+          <p:nvPr/>
+        </p:nvSpPr>
+        <p:spPr>
+          <a:xfrm>
+            <a:off x="7589520" y="5029200"/>
+            <a:ext cx="3200400" cy="731520"/>
+          </a:xfrm>
+          <a:prstGeom prst="rect">
+            <a:avLst/>
+          </a:prstGeom>
+          <a:noFill/>
+        </p:spPr>
+        <p:txBody>
+          <a:bodyPr wrap="square">
+            <a:spAutoFit/>
+          </a:bodyPr>
+          <a:lstStyle/>
+          <a:p>
+            <a:pPr algn="l">
+              <a:defRPr sz="1100" b="0">
+                <a:solidFill>
+                  <a:srgbClr val="FF5050"/>
+                </a:solidFill>
+              </a:defRPr>
+            </a:pPr>
+            <a:r>
+              <a:t>100K+ or Images</a:t>
+            </a:r>
+            <a:br/>
+            <a:r>
+              <a:t>Deep Learning</a:t>
+            </a:r>
+            <a:br/>
+            <a:r>
+              <a:t>CNN, LSTM, YOLO</a:t>
+            </a:r>
+          </a:p>
+        </p:txBody>
+      </p:sp>
+    </p:spTree>
+  </p:cSld>
+  <p:clrMapOvr>
+    <a:masterClrMapping/>
+  </p:clrMapOvr>
+</p:sld>
+</file>
+
+<file path=ppt/slides/slide25.xml><?xml version="1.0" encoding="utf-8"?>
+<p:sld xmlns:a="http://schemas.openxmlformats.org/drawingml/2006/main" xmlns:p="http://schemas.openxmlformats.org/presentationml/2006/main" xmlns:r="http://schemas.openxmlformats.org/officeDocument/2006/relationships">
+  <p:cSld>
+    <p:bg>
+      <p:bgPr>
+        <a:solidFill>
+          <a:srgbClr val="1E1E28"/>
+        </a:solidFill>
+        <a:effectLst/>
+      </p:bgPr>
+    </p:bg>
+    <p:spTree>
+      <p:nvGrpSpPr>
+        <p:cNvPr id="1" name=""/>
+        <p:cNvGrpSpPr/>
+        <p:nvPr/>
+      </p:nvGrpSpPr>
+      <p:grpSpPr/>
+      <p:sp>
+        <p:nvSpPr>
+          <p:cNvPr id="2" name="TextBox 1"/>
+          <p:cNvSpPr txBox="1"/>
+          <p:nvPr/>
+        </p:nvSpPr>
+        <p:spPr>
+          <a:xfrm>
+            <a:off x="457200" y="274320"/>
+            <a:ext cx="10972800" cy="731520"/>
+          </a:xfrm>
+          <a:prstGeom prst="rect">
+            <a:avLst/>
+          </a:prstGeom>
+          <a:noFill/>
+        </p:spPr>
+        <p:txBody>
+          <a:bodyPr wrap="square">
+            <a:spAutoFit/>
+          </a:bodyPr>
+          <a:lstStyle/>
+          <a:p>
+            <a:pPr algn="l">
+              <a:defRPr sz="2600" b="1">
+                <a:solidFill>
+                  <a:srgbClr val="0096FF"/>
+                </a:solidFill>
+              </a:defRPr>
+            </a:pPr>
+            <a:r>
+              <a:t>6 Expert Tricks for Model Selection</a:t>
+            </a:r>
+          </a:p>
+        </p:txBody>
+      </p:sp>
+      <p:sp>
+        <p:nvSpPr>
+          <p:cNvPr id="3" name="Rectangle 2"/>
+          <p:cNvSpPr/>
+          <p:nvPr/>
+        </p:nvSpPr>
+        <p:spPr>
+          <a:xfrm>
+            <a:off x="457200" y="1097280"/>
+            <a:ext cx="3566160" cy="2468880"/>
+          </a:xfrm>
+          <a:prstGeom prst="rect">
+            <a:avLst/>
+          </a:prstGeom>
+          <a:solidFill>
+            <a:srgbClr val="2D2D3C"/>
+          </a:solidFill>
+          <a:ln>
+            <a:noFill/>
+          </a:ln>
+        </p:spPr>
+        <p:style>
+          <a:lnRef idx="1">
+            <a:schemeClr val="accent1"/>
+          </a:lnRef>
+          <a:fillRef idx="3">
+            <a:schemeClr val="accent1"/>
+          </a:fillRef>
+          <a:effectRef idx="2">
+            <a:schemeClr val="accent1"/>
+          </a:effectRef>
+          <a:fontRef idx="minor">
+            <a:schemeClr val="lt1"/>
+          </a:fontRef>
+        </p:style>
+        <p:txBody>
+          <a:bodyPr rtlCol="0" anchor="ctr"/>
+          <a:lstStyle/>
+          <a:p>
+            <a:pPr algn="ctr"/>
+          </a:p>
+        </p:txBody>
+      </p:sp>
+      <p:sp>
+        <p:nvSpPr>
+          <p:cNvPr id="4" name="TextBox 3"/>
+          <p:cNvSpPr txBox="1"/>
+          <p:nvPr/>
+        </p:nvSpPr>
+        <p:spPr>
+          <a:xfrm>
+            <a:off x="548640" y="1188720"/>
+            <a:ext cx="3383280" cy="365760"/>
+          </a:xfrm>
+          <a:prstGeom prst="rect">
+            <a:avLst/>
+          </a:prstGeom>
+          <a:noFill/>
+        </p:spPr>
+        <p:txBody>
+          <a:bodyPr wrap="square">
+            <a:spAutoFit/>
+          </a:bodyPr>
+          <a:lstStyle/>
+          <a:p>
+            <a:pPr algn="ctr">
+              <a:defRPr sz="1400" b="1">
+                <a:solidFill>
+                  <a:srgbClr val="00C864"/>
+                </a:solidFill>
+              </a:defRPr>
+            </a:pPr>
+            <a:r>
+              <a:t>1. START SIMPLE</a:t>
+            </a:r>
+          </a:p>
+        </p:txBody>
+      </p:sp>
+      <p:sp>
+        <p:nvSpPr>
+          <p:cNvPr id="5" name="TextBox 4"/>
+          <p:cNvSpPr txBox="1"/>
+          <p:nvPr/>
+        </p:nvSpPr>
+        <p:spPr>
+          <a:xfrm>
+            <a:off x="594360" y="1737360"/>
+            <a:ext cx="3291840" cy="1645920"/>
+          </a:xfrm>
+          <a:prstGeom prst="rect">
+            <a:avLst/>
+          </a:prstGeom>
+          <a:noFill/>
+        </p:spPr>
+        <p:txBody>
+          <a:bodyPr wrap="square">
+            <a:spAutoFit/>
+          </a:bodyPr>
+          <a:lstStyle/>
+          <a:p>
+            <a:pPr algn="ctr">
+              <a:defRPr sz="1200" b="0">
+                <a:solidFill>
+                  <a:srgbClr val="C8C8D2"/>
+                </a:solidFill>
+              </a:defRPr>
+            </a:pPr>
+            <a:r>
+              <a:t>Try Logistic Regression first</a:t>
+            </a:r>
+            <a:br/>
+            <a:r>
+              <a:t>If low -&gt; Random Forest</a:t>
+            </a:r>
+            <a:br/>
+            <a:r>
+              <a:t>Still low -&gt; Neural Network</a:t>
+            </a:r>
+          </a:p>
+        </p:txBody>
+      </p:sp>
+      <p:sp>
+        <p:nvSpPr>
+          <p:cNvPr id="6" name="Rectangle 5"/>
+          <p:cNvSpPr/>
+          <p:nvPr/>
+        </p:nvSpPr>
+        <p:spPr>
+          <a:xfrm>
+            <a:off x="4251960" y="1097280"/>
+            <a:ext cx="3566160" cy="2468880"/>
+          </a:xfrm>
+          <a:prstGeom prst="rect">
+            <a:avLst/>
+          </a:prstGeom>
+          <a:solidFill>
+            <a:srgbClr val="2D2D3C"/>
+          </a:solidFill>
+          <a:ln>
+            <a:noFill/>
+          </a:ln>
+        </p:spPr>
+        <p:style>
+          <a:lnRef idx="1">
+            <a:schemeClr val="accent1"/>
+          </a:lnRef>
+          <a:fillRef idx="3">
+            <a:schemeClr val="accent1"/>
+          </a:fillRef>
+          <a:effectRef idx="2">
+            <a:schemeClr val="accent1"/>
+          </a:effectRef>
+          <a:fontRef idx="minor">
+            <a:schemeClr val="lt1"/>
+          </a:fontRef>
+        </p:style>
+        <p:txBody>
+          <a:bodyPr rtlCol="0" anchor="ctr"/>
+          <a:lstStyle/>
+          <a:p>
+            <a:pPr algn="ctr"/>
+          </a:p>
+        </p:txBody>
+      </p:sp>
+      <p:sp>
+        <p:nvSpPr>
+          <p:cNvPr id="7" name="TextBox 6"/>
+          <p:cNvSpPr txBox="1"/>
+          <p:nvPr/>
+        </p:nvSpPr>
+        <p:spPr>
+          <a:xfrm>
+            <a:off x="4343400" y="1188720"/>
+            <a:ext cx="3383280" cy="365760"/>
+          </a:xfrm>
+          <a:prstGeom prst="rect">
+            <a:avLst/>
+          </a:prstGeom>
+          <a:noFill/>
+        </p:spPr>
+        <p:txBody>
+          <a:bodyPr wrap="square">
+            <a:spAutoFit/>
+          </a:bodyPr>
+          <a:lstStyle/>
+          <a:p>
+            <a:pPr algn="ctr">
+              <a:defRPr sz="1400" b="1">
+                <a:solidFill>
+                  <a:srgbClr val="0096FF"/>
+                </a:solidFill>
+              </a:defRPr>
+            </a:pPr>
+            <a:r>
+              <a:t>2. DATA SIZE</a:t>
+            </a:r>
+          </a:p>
+        </p:txBody>
+      </p:sp>
+      <p:sp>
+        <p:nvSpPr>
+          <p:cNvPr id="8" name="TextBox 7"/>
+          <p:cNvSpPr txBox="1"/>
+          <p:nvPr/>
+        </p:nvSpPr>
+        <p:spPr>
+          <a:xfrm>
+            <a:off x="4389120" y="1737360"/>
+            <a:ext cx="3291840" cy="1645920"/>
+          </a:xfrm>
+          <a:prstGeom prst="rect">
+            <a:avLst/>
+          </a:prstGeom>
+          <a:noFill/>
+        </p:spPr>
+        <p:txBody>
+          <a:bodyPr wrap="square">
+            <a:spAutoFit/>
+          </a:bodyPr>
+          <a:lstStyle/>
+          <a:p>
+            <a:pPr algn="ctr">
+              <a:defRPr sz="1200" b="0">
+                <a:solidFill>
+                  <a:srgbClr val="C8C8D2"/>
+                </a:solidFill>
+              </a:defRPr>
+            </a:pPr>
+            <a:r>
+              <a:t>&lt; 1K = simple model</a:t>
+            </a:r>
+            <a:br/>
+            <a:r>
+              <a:t>1K-100K = Random Forest</a:t>
+            </a:r>
+            <a:br/>
+            <a:r>
+              <a:t>100K+ = Deep Learning</a:t>
+            </a:r>
+          </a:p>
+        </p:txBody>
+      </p:sp>
+      <p:sp>
+        <p:nvSpPr>
+          <p:cNvPr id="9" name="Rectangle 8"/>
+          <p:cNvSpPr/>
+          <p:nvPr/>
+        </p:nvSpPr>
+        <p:spPr>
+          <a:xfrm>
+            <a:off x="8046720" y="1097280"/>
+            <a:ext cx="3566160" cy="2468880"/>
+          </a:xfrm>
+          <a:prstGeom prst="rect">
+            <a:avLst/>
+          </a:prstGeom>
+          <a:solidFill>
+            <a:srgbClr val="2D2D3C"/>
+          </a:solidFill>
+          <a:ln>
+            <a:noFill/>
+          </a:ln>
+        </p:spPr>
+        <p:style>
+          <a:lnRef idx="1">
+            <a:schemeClr val="accent1"/>
+          </a:lnRef>
+          <a:fillRef idx="3">
+            <a:schemeClr val="accent1"/>
+          </a:fillRef>
+          <a:effectRef idx="2">
+            <a:schemeClr val="accent1"/>
+          </a:effectRef>
+          <a:fontRef idx="minor">
+            <a:schemeClr val="lt1"/>
+          </a:fontRef>
+        </p:style>
+        <p:txBody>
+          <a:bodyPr rtlCol="0" anchor="ctr"/>
+          <a:lstStyle/>
+          <a:p>
+            <a:pPr algn="ctr"/>
+          </a:p>
+        </p:txBody>
+      </p:sp>
+      <p:sp>
+        <p:nvSpPr>
+          <p:cNvPr id="10" name="TextBox 9"/>
+          <p:cNvSpPr txBox="1"/>
+          <p:nvPr/>
+        </p:nvSpPr>
+        <p:spPr>
+          <a:xfrm>
+            <a:off x="8138160" y="1188720"/>
+            <a:ext cx="3383280" cy="365760"/>
+          </a:xfrm>
+          <a:prstGeom prst="rect">
+            <a:avLst/>
+          </a:prstGeom>
+          <a:noFill/>
+        </p:spPr>
+        <p:txBody>
+          <a:bodyPr wrap="square">
+            <a:spAutoFit/>
+          </a:bodyPr>
+          <a:lstStyle/>
+          <a:p>
+            <a:pPr algn="ctr">
+              <a:defRPr sz="1400" b="1">
+                <a:solidFill>
+                  <a:srgbClr val="FFA500"/>
+                </a:solidFill>
+              </a:defRPr>
+            </a:pPr>
+            <a:r>
+              <a:t>3. CHECK EXISTING</a:t>
+            </a:r>
+          </a:p>
+        </p:txBody>
+      </p:sp>
+      <p:sp>
+        <p:nvSpPr>
+          <p:cNvPr id="11" name="TextBox 10"/>
+          <p:cNvSpPr txBox="1"/>
+          <p:nvPr/>
+        </p:nvSpPr>
+        <p:spPr>
+          <a:xfrm>
+            <a:off x="8183880" y="1737360"/>
+            <a:ext cx="3291840" cy="1645920"/>
+          </a:xfrm>
+          <a:prstGeom prst="rect">
+            <a:avLst/>
+          </a:prstGeom>
+          <a:noFill/>
+        </p:spPr>
+        <p:txBody>
+          <a:bodyPr wrap="square">
+            <a:spAutoFit/>
+          </a:bodyPr>
+          <a:lstStyle/>
+          <a:p>
+            <a:pPr algn="ctr">
+              <a:defRPr sz="1200" b="0">
+                <a:solidFill>
+                  <a:srgbClr val="C8C8D2"/>
+                </a:solidFill>
+              </a:defRPr>
+            </a:pPr>
+            <a:r>
+              <a:t>YOLO for objects</a:t>
+            </a:r>
+            <a:br/>
+            <a:r>
+              <a:t>BERT for text</a:t>
+            </a:r>
+            <a:br/>
+            <a:r>
+              <a:t>Most problems = solved!</a:t>
+            </a:r>
+          </a:p>
+        </p:txBody>
+      </p:sp>
+      <p:sp>
+        <p:nvSpPr>
+          <p:cNvPr id="12" name="Rectangle 11"/>
+          <p:cNvSpPr/>
+          <p:nvPr/>
+        </p:nvSpPr>
+        <p:spPr>
+          <a:xfrm>
+            <a:off x="457200" y="3931920"/>
+            <a:ext cx="3566160" cy="2468880"/>
+          </a:xfrm>
+          <a:prstGeom prst="rect">
+            <a:avLst/>
+          </a:prstGeom>
+          <a:solidFill>
+            <a:srgbClr val="2D2D3C"/>
+          </a:solidFill>
+          <a:ln>
+            <a:noFill/>
+          </a:ln>
+        </p:spPr>
+        <p:style>
+          <a:lnRef idx="1">
+            <a:schemeClr val="accent1"/>
+          </a:lnRef>
+          <a:fillRef idx="3">
+            <a:schemeClr val="accent1"/>
+          </a:fillRef>
+          <a:effectRef idx="2">
+            <a:schemeClr val="accent1"/>
+          </a:effectRef>
+          <a:fontRef idx="minor">
+            <a:schemeClr val="lt1"/>
+          </a:fontRef>
+        </p:style>
+        <p:txBody>
+          <a:bodyPr rtlCol="0" anchor="ctr"/>
+          <a:lstStyle/>
+          <a:p>
+            <a:pPr algn="ctr"/>
+          </a:p>
+        </p:txBody>
+      </p:sp>
+      <p:sp>
+        <p:nvSpPr>
+          <p:cNvPr id="13" name="TextBox 12"/>
+          <p:cNvSpPr txBox="1"/>
+          <p:nvPr/>
+        </p:nvSpPr>
+        <p:spPr>
+          <a:xfrm>
+            <a:off x="548640" y="4023359"/>
+            <a:ext cx="3383280" cy="365760"/>
+          </a:xfrm>
+          <a:prstGeom prst="rect">
+            <a:avLst/>
+          </a:prstGeom>
+          <a:noFill/>
+        </p:spPr>
+        <p:txBody>
+          <a:bodyPr wrap="square">
+            <a:spAutoFit/>
+          </a:bodyPr>
+          <a:lstStyle/>
+          <a:p>
+            <a:pPr algn="ctr">
+              <a:defRPr sz="1400" b="1">
+                <a:solidFill>
+                  <a:srgbClr val="B464FF"/>
+                </a:solidFill>
+              </a:defRPr>
+            </a:pPr>
+            <a:r>
+              <a:t>4. TRANSFER LEARN</a:t>
+            </a:r>
+          </a:p>
+        </p:txBody>
+      </p:sp>
+      <p:sp>
+        <p:nvSpPr>
+          <p:cNvPr id="14" name="TextBox 13"/>
+          <p:cNvSpPr txBox="1"/>
+          <p:nvPr/>
+        </p:nvSpPr>
+        <p:spPr>
+          <a:xfrm>
+            <a:off x="594360" y="4572000"/>
+            <a:ext cx="3291840" cy="1645920"/>
+          </a:xfrm>
+          <a:prstGeom prst="rect">
+            <a:avLst/>
+          </a:prstGeom>
+          <a:noFill/>
+        </p:spPr>
+        <p:txBody>
+          <a:bodyPr wrap="square">
+            <a:spAutoFit/>
+          </a:bodyPr>
+          <a:lstStyle/>
+          <a:p>
+            <a:pPr algn="ctr">
+              <a:defRPr sz="1200" b="0">
+                <a:solidFill>
+                  <a:srgbClr val="C8C8D2"/>
+                </a:solidFill>
+              </a:defRPr>
+            </a:pPr>
+            <a:r>
+              <a:t>Use PRE-TRAINED model</a:t>
+            </a:r>
+            <a:br/>
+            <a:r>
+              <a:t>Fine-tune with YOUR data</a:t>
+            </a:r>
+            <a:br/>
+            <a:r>
+              <a:t>500 images vs 1 million!</a:t>
+            </a:r>
+          </a:p>
+        </p:txBody>
+      </p:sp>
+      <p:sp>
+        <p:nvSpPr>
+          <p:cNvPr id="15" name="Rectangle 14"/>
+          <p:cNvSpPr/>
+          <p:nvPr/>
+        </p:nvSpPr>
+        <p:spPr>
+          <a:xfrm>
+            <a:off x="4251960" y="3931920"/>
+            <a:ext cx="3566160" cy="2468880"/>
+          </a:xfrm>
+          <a:prstGeom prst="rect">
+            <a:avLst/>
+          </a:prstGeom>
+          <a:solidFill>
+            <a:srgbClr val="2D2D3C"/>
+          </a:solidFill>
+          <a:ln>
+            <a:noFill/>
+          </a:ln>
+        </p:spPr>
+        <p:style>
+          <a:lnRef idx="1">
+            <a:schemeClr val="accent1"/>
+          </a:lnRef>
+          <a:fillRef idx="3">
+            <a:schemeClr val="accent1"/>
+          </a:fillRef>
+          <a:effectRef idx="2">
+            <a:schemeClr val="accent1"/>
+          </a:effectRef>
+          <a:fontRef idx="minor">
+            <a:schemeClr val="lt1"/>
+          </a:fontRef>
+        </p:style>
+        <p:txBody>
+          <a:bodyPr rtlCol="0" anchor="ctr"/>
+          <a:lstStyle/>
+          <a:p>
+            <a:pPr algn="ctr"/>
+          </a:p>
+        </p:txBody>
+      </p:sp>
+      <p:sp>
+        <p:nvSpPr>
+          <p:cNvPr id="16" name="TextBox 15"/>
+          <p:cNvSpPr txBox="1"/>
+          <p:nvPr/>
+        </p:nvSpPr>
+        <p:spPr>
+          <a:xfrm>
+            <a:off x="4343400" y="4023359"/>
+            <a:ext cx="3383280" cy="365760"/>
+          </a:xfrm>
+          <a:prstGeom prst="rect">
+            <a:avLst/>
+          </a:prstGeom>
+          <a:noFill/>
+        </p:spPr>
+        <p:txBody>
+          <a:bodyPr wrap="square">
+            <a:spAutoFit/>
+          </a:bodyPr>
+          <a:lstStyle/>
+          <a:p>
+            <a:pPr algn="ctr">
+              <a:defRPr sz="1400" b="1">
+                <a:solidFill>
+                  <a:srgbClr val="FF5050"/>
+                </a:solidFill>
+              </a:defRPr>
+            </a:pPr>
+            <a:r>
+              <a:t>5. MAP SUB-PROBLEMS</a:t>
+            </a:r>
+          </a:p>
+        </p:txBody>
+      </p:sp>
+      <p:sp>
+        <p:nvSpPr>
+          <p:cNvPr id="17" name="TextBox 16"/>
+          <p:cNvSpPr txBox="1"/>
+          <p:nvPr/>
+        </p:nvSpPr>
+        <p:spPr>
+          <a:xfrm>
+            <a:off x="4389120" y="4572000"/>
+            <a:ext cx="3291840" cy="1645920"/>
+          </a:xfrm>
+          <a:prstGeom prst="rect">
+            <a:avLst/>
+          </a:prstGeom>
+          <a:noFill/>
+        </p:spPr>
+        <p:txBody>
+          <a:bodyPr wrap="square">
+            <a:spAutoFit/>
+          </a:bodyPr>
+          <a:lstStyle/>
+          <a:p>
+            <a:pPr algn="ctr">
+              <a:defRPr sz="1200" b="0">
+                <a:solidFill>
+                  <a:srgbClr val="C8C8D2"/>
+                </a:solidFill>
+              </a:defRPr>
+            </a:pPr>
+            <a:r>
+              <a:t>Each piece = different model</a:t>
+            </a:r>
+            <a:br/>
+            <a:r>
+              <a:t>ExamGuard = 7 models</a:t>
+            </a:r>
+            <a:br/>
+            <a:r>
+              <a:t>working together</a:t>
+            </a:r>
+          </a:p>
+        </p:txBody>
+      </p:sp>
+      <p:sp>
+        <p:nvSpPr>
+          <p:cNvPr id="18" name="Rectangle 17"/>
+          <p:cNvSpPr/>
+          <p:nvPr/>
+        </p:nvSpPr>
+        <p:spPr>
+          <a:xfrm>
+            <a:off x="8046720" y="3931920"/>
+            <a:ext cx="3566160" cy="2468880"/>
+          </a:xfrm>
+          <a:prstGeom prst="rect">
+            <a:avLst/>
+          </a:prstGeom>
+          <a:solidFill>
+            <a:srgbClr val="2D2D3C"/>
+          </a:solidFill>
+          <a:ln>
+            <a:noFill/>
+          </a:ln>
+        </p:spPr>
+        <p:style>
+          <a:lnRef idx="1">
+            <a:schemeClr val="accent1"/>
+          </a:lnRef>
+          <a:fillRef idx="3">
+            <a:schemeClr val="accent1"/>
+          </a:fillRef>
+          <a:effectRef idx="2">
+            <a:schemeClr val="accent1"/>
+          </a:effectRef>
+          <a:fontRef idx="minor">
+            <a:schemeClr val="lt1"/>
+          </a:fontRef>
+        </p:style>
+        <p:txBody>
+          <a:bodyPr rtlCol="0" anchor="ctr"/>
+          <a:lstStyle/>
+          <a:p>
+            <a:pPr algn="ctr"/>
+          </a:p>
+        </p:txBody>
+      </p:sp>
+      <p:sp>
+        <p:nvSpPr>
+          <p:cNvPr id="19" name="TextBox 18"/>
+          <p:cNvSpPr txBox="1"/>
+          <p:nvPr/>
+        </p:nvSpPr>
+        <p:spPr>
+          <a:xfrm>
+            <a:off x="8138160" y="4023359"/>
+            <a:ext cx="3383280" cy="365760"/>
+          </a:xfrm>
+          <a:prstGeom prst="rect">
+            <a:avLst/>
+          </a:prstGeom>
+          <a:noFill/>
+        </p:spPr>
+        <p:txBody>
+          <a:bodyPr wrap="square">
+            <a:spAutoFit/>
+          </a:bodyPr>
+          <a:lstStyle/>
+          <a:p>
+            <a:pPr algn="ctr">
+              <a:defRPr sz="1400" b="1">
+                <a:solidFill>
+                  <a:srgbClr val="FFDC32"/>
+                </a:solidFill>
+              </a:defRPr>
+            </a:pPr>
+            <a:r>
+              <a:t>6. TEST MULTIPLE</a:t>
+            </a:r>
+          </a:p>
+        </p:txBody>
+      </p:sp>
+      <p:sp>
+        <p:nvSpPr>
+          <p:cNvPr id="20" name="TextBox 19"/>
+          <p:cNvSpPr txBox="1"/>
+          <p:nvPr/>
+        </p:nvSpPr>
+        <p:spPr>
+          <a:xfrm>
+            <a:off x="8183880" y="4572000"/>
+            <a:ext cx="3291840" cy="1645920"/>
+          </a:xfrm>
+          <a:prstGeom prst="rect">
+            <a:avLst/>
+          </a:prstGeom>
+          <a:noFill/>
+        </p:spPr>
+        <p:txBody>
+          <a:bodyPr wrap="square">
+            <a:spAutoFit/>
+          </a:bodyPr>
+          <a:lstStyle/>
+          <a:p>
+            <a:pPr algn="ctr">
+              <a:defRPr sz="1200" b="0">
+                <a:solidFill>
+                  <a:srgbClr val="C8C8D2"/>
+                </a:solidFill>
+              </a:defRPr>
+            </a:pPr>
+            <a:r>
+              <a:t>Try 3-4 models on same data</a:t>
+            </a:r>
+            <a:br/>
+            <a:r>
+              <a:t>Pick best accuracy + speed</a:t>
+            </a:r>
+            <a:br/>
+            <a:r>
+              <a:t>Don't guess, MEASURE!</a:t>
+            </a:r>
+          </a:p>
+        </p:txBody>
+      </p:sp>
+    </p:spTree>
+  </p:cSld>
+  <p:clrMapOvr>
+    <a:masterClrMapping/>
+  </p:clrMapOvr>
+</p:sld>
+</file>
+
+<file path=ppt/slides/slide26.xml><?xml version="1.0" encoding="utf-8"?>
+<p:sld xmlns:a="http://schemas.openxmlformats.org/drawingml/2006/main" xmlns:p="http://schemas.openxmlformats.org/presentationml/2006/main" xmlns:r="http://schemas.openxmlformats.org/officeDocument/2006/relationships">
+  <p:cSld>
+    <p:bg>
+      <p:bgPr>
+        <a:solidFill>
+          <a:srgbClr val="1E1E28"/>
+        </a:solidFill>
+        <a:effectLst/>
+      </p:bgPr>
+    </p:bg>
+    <p:spTree>
+      <p:nvGrpSpPr>
+        <p:cNvPr id="1" name=""/>
+        <p:cNvGrpSpPr/>
+        <p:nvPr/>
+      </p:nvGrpSpPr>
+      <p:grpSpPr/>
+      <p:sp>
+        <p:nvSpPr>
+          <p:cNvPr id="2" name="TextBox 1"/>
+          <p:cNvSpPr txBox="1"/>
+          <p:nvPr/>
+        </p:nvSpPr>
+        <p:spPr>
+          <a:xfrm>
+            <a:off x="457200" y="274320"/>
+            <a:ext cx="10972800" cy="731520"/>
+          </a:xfrm>
+          <a:prstGeom prst="rect">
+            <a:avLst/>
+          </a:prstGeom>
+          <a:noFill/>
+        </p:spPr>
+        <p:txBody>
+          <a:bodyPr wrap="square">
+            <a:spAutoFit/>
+          </a:bodyPr>
+          <a:lstStyle/>
+          <a:p>
+            <a:pPr algn="l">
+              <a:defRPr sz="2600" b="1">
+                <a:solidFill>
+                  <a:srgbClr val="0096FF"/>
+                </a:solidFill>
+              </a:defRPr>
+            </a:pPr>
+            <a:r>
+              <a:t>ExamGuard AI - Model Map</a:t>
+            </a:r>
+          </a:p>
+        </p:txBody>
+      </p:sp>
+      <p:sp>
+        <p:nvSpPr>
+          <p:cNvPr id="3" name="TextBox 2"/>
+          <p:cNvSpPr txBox="1"/>
+          <p:nvPr/>
+        </p:nvSpPr>
+        <p:spPr>
+          <a:xfrm>
+            <a:off x="457200" y="914400"/>
+            <a:ext cx="10972800" cy="457200"/>
+          </a:xfrm>
+          <a:prstGeom prst="rect">
+            <a:avLst/>
+          </a:prstGeom>
+          <a:noFill/>
+        </p:spPr>
+        <p:txBody>
+          <a:bodyPr wrap="square">
+            <a:spAutoFit/>
+          </a:bodyPr>
+          <a:lstStyle/>
+          <a:p>
+            <a:pPr algn="ctr">
+              <a:defRPr sz="1500" b="0">
+                <a:solidFill>
+                  <a:srgbClr val="C8C8D2"/>
+                </a:solidFill>
+              </a:defRPr>
+            </a:pPr>
+            <a:r>
+              <a:t>Each sub-problem -&gt; right ML type -&gt; best model</a:t>
+            </a:r>
+          </a:p>
+        </p:txBody>
+      </p:sp>
+      <p:sp>
+        <p:nvSpPr>
+          <p:cNvPr id="4" name="Rectangle 3"/>
+          <p:cNvSpPr/>
+          <p:nvPr/>
+        </p:nvSpPr>
+        <p:spPr>
+          <a:xfrm>
+            <a:off x="274320" y="1554480"/>
+            <a:ext cx="2743200" cy="2286000"/>
+          </a:xfrm>
+          <a:prstGeom prst="rect">
+            <a:avLst/>
+          </a:prstGeom>
+          <a:solidFill>
+            <a:srgbClr val="2D2D3C"/>
+          </a:solidFill>
+          <a:ln>
+            <a:noFill/>
+          </a:ln>
+        </p:spPr>
+        <p:style>
+          <a:lnRef idx="1">
+            <a:schemeClr val="accent1"/>
+          </a:lnRef>
+          <a:fillRef idx="3">
+            <a:schemeClr val="accent1"/>
+          </a:fillRef>
+          <a:effectRef idx="2">
+            <a:schemeClr val="accent1"/>
+          </a:effectRef>
+          <a:fontRef idx="minor">
+            <a:schemeClr val="lt1"/>
+          </a:fontRef>
+        </p:style>
+        <p:txBody>
+          <a:bodyPr rtlCol="0" anchor="ctr"/>
+          <a:lstStyle/>
+          <a:p>
+            <a:pPr algn="ctr"/>
+          </a:p>
+        </p:txBody>
+      </p:sp>
+      <p:sp>
+        <p:nvSpPr>
+          <p:cNvPr id="5" name="TextBox 4"/>
+          <p:cNvSpPr txBox="1"/>
+          <p:nvPr/>
+        </p:nvSpPr>
+        <p:spPr>
+          <a:xfrm>
+            <a:off x="365760" y="1645920"/>
+            <a:ext cx="2560320" cy="320040"/>
+          </a:xfrm>
+          <a:prstGeom prst="rect">
+            <a:avLst/>
+          </a:prstGeom>
+          <a:noFill/>
+        </p:spPr>
+        <p:txBody>
+          <a:bodyPr wrap="square">
+            <a:spAutoFit/>
+          </a:bodyPr>
+          <a:lstStyle/>
+          <a:p>
+            <a:pPr algn="ctr">
+              <a:defRPr sz="1200" b="1">
+                <a:solidFill>
+                  <a:srgbClr val="FFFFFF"/>
+                </a:solidFill>
+              </a:defRPr>
+            </a:pPr>
+            <a:r>
+              <a:t>Detect Phone</a:t>
+            </a:r>
+          </a:p>
+        </p:txBody>
+      </p:sp>
+      <p:sp>
+        <p:nvSpPr>
+          <p:cNvPr id="6" name="TextBox 5"/>
+          <p:cNvSpPr txBox="1"/>
+          <p:nvPr/>
+        </p:nvSpPr>
+        <p:spPr>
+          <a:xfrm>
+            <a:off x="365760" y="2011680"/>
+            <a:ext cx="2560320" cy="274320"/>
+          </a:xfrm>
+          <a:prstGeom prst="rect">
+            <a:avLst/>
+          </a:prstGeom>
+          <a:noFill/>
+        </p:spPr>
+        <p:txBody>
+          <a:bodyPr wrap="square">
+            <a:spAutoFit/>
+          </a:bodyPr>
+          <a:lstStyle/>
+          <a:p>
+            <a:pPr algn="ctr">
+              <a:defRPr sz="1000" b="1">
+                <a:solidFill>
+                  <a:srgbClr val="00C864"/>
+                </a:solidFill>
+              </a:defRPr>
+            </a:pPr>
+            <a:r>
+              <a:t>SUPERVISED</a:t>
+            </a:r>
+          </a:p>
+        </p:txBody>
+      </p:sp>
+      <p:sp>
+        <p:nvSpPr>
+          <p:cNvPr id="7" name="TextBox 6"/>
+          <p:cNvSpPr txBox="1"/>
+          <p:nvPr/>
+        </p:nvSpPr>
+        <p:spPr>
+          <a:xfrm>
+            <a:off x="365760" y="2377440"/>
+            <a:ext cx="2560320" cy="320040"/>
+          </a:xfrm>
+          <a:prstGeom prst="rect">
+            <a:avLst/>
+          </a:prstGeom>
+          <a:noFill/>
+        </p:spPr>
+        <p:txBody>
+          <a:bodyPr wrap="square">
+            <a:spAutoFit/>
+          </a:bodyPr>
+          <a:lstStyle/>
+          <a:p>
+            <a:pPr algn="ctr">
+              <a:defRPr sz="1400" b="1">
+                <a:solidFill>
+                  <a:srgbClr val="FFDC32"/>
+                </a:solidFill>
+              </a:defRPr>
+            </a:pPr>
+            <a:r>
+              <a:t>YOLO</a:t>
+            </a:r>
+          </a:p>
+        </p:txBody>
+      </p:sp>
+      <p:sp>
+        <p:nvSpPr>
+          <p:cNvPr id="8" name="TextBox 7"/>
+          <p:cNvSpPr txBox="1"/>
+          <p:nvPr/>
+        </p:nvSpPr>
+        <p:spPr>
+          <a:xfrm>
+            <a:off x="365760" y="2834639"/>
+            <a:ext cx="2560320" cy="731520"/>
+          </a:xfrm>
+          <a:prstGeom prst="rect">
+            <a:avLst/>
+          </a:prstGeom>
+          <a:noFill/>
+        </p:spPr>
+        <p:txBody>
+          <a:bodyPr wrap="square">
+            <a:spAutoFit/>
+          </a:bodyPr>
+          <a:lstStyle/>
+          <a:p>
+            <a:pPr algn="ctr">
+              <a:defRPr sz="1100" b="0">
+                <a:solidFill>
+                  <a:srgbClr val="C8C8D2"/>
+                </a:solidFill>
+              </a:defRPr>
+            </a:pPr>
+            <a:r>
+              <a:t>Pre-trained</a:t>
+            </a:r>
+            <a:br/>
+            <a:r>
+              <a:t>real-time</a:t>
+            </a:r>
+          </a:p>
+        </p:txBody>
+      </p:sp>
+      <p:sp>
+        <p:nvSpPr>
+          <p:cNvPr id="9" name="Rectangle 8"/>
+          <p:cNvSpPr/>
+          <p:nvPr/>
+        </p:nvSpPr>
+        <p:spPr>
+          <a:xfrm>
+            <a:off x="3246120" y="1554480"/>
+            <a:ext cx="2743200" cy="2286000"/>
+          </a:xfrm>
+          <a:prstGeom prst="rect">
+            <a:avLst/>
+          </a:prstGeom>
+          <a:solidFill>
+            <a:srgbClr val="2D2D3C"/>
+          </a:solidFill>
+          <a:ln>
+            <a:noFill/>
+          </a:ln>
+        </p:spPr>
+        <p:style>
+          <a:lnRef idx="1">
+            <a:schemeClr val="accent1"/>
+          </a:lnRef>
+          <a:fillRef idx="3">
+            <a:schemeClr val="accent1"/>
+          </a:fillRef>
+          <a:effectRef idx="2">
+            <a:schemeClr val="accent1"/>
+          </a:effectRef>
+          <a:fontRef idx="minor">
+            <a:schemeClr val="lt1"/>
+          </a:fontRef>
+        </p:style>
+        <p:txBody>
+          <a:bodyPr rtlCol="0" anchor="ctr"/>
+          <a:lstStyle/>
+          <a:p>
+            <a:pPr algn="ctr"/>
+          </a:p>
+        </p:txBody>
+      </p:sp>
+      <p:sp>
+        <p:nvSpPr>
+          <p:cNvPr id="10" name="TextBox 9"/>
+          <p:cNvSpPr txBox="1"/>
+          <p:nvPr/>
+        </p:nvSpPr>
+        <p:spPr>
+          <a:xfrm>
+            <a:off x="3337560" y="1645920"/>
+            <a:ext cx="2560320" cy="320040"/>
+          </a:xfrm>
+          <a:prstGeom prst="rect">
+            <a:avLst/>
+          </a:prstGeom>
+          <a:noFill/>
+        </p:spPr>
+        <p:txBody>
+          <a:bodyPr wrap="square">
+            <a:spAutoFit/>
+          </a:bodyPr>
+          <a:lstStyle/>
+          <a:p>
+            <a:pPr algn="ctr">
+              <a:defRPr sz="1200" b="1">
+                <a:solidFill>
+                  <a:srgbClr val="FFFFFF"/>
+                </a:solidFill>
+              </a:defRPr>
+            </a:pPr>
+            <a:r>
+              <a:t>Where Looking?</a:t>
+            </a:r>
+          </a:p>
+        </p:txBody>
+      </p:sp>
+      <p:sp>
+        <p:nvSpPr>
+          <p:cNvPr id="11" name="TextBox 10"/>
+          <p:cNvSpPr txBox="1"/>
+          <p:nvPr/>
+        </p:nvSpPr>
+        <p:spPr>
+          <a:xfrm>
+            <a:off x="3337560" y="2011680"/>
+            <a:ext cx="2560320" cy="274320"/>
+          </a:xfrm>
+          <a:prstGeom prst="rect">
+            <a:avLst/>
+          </a:prstGeom>
+          <a:noFill/>
+        </p:spPr>
+        <p:txBody>
+          <a:bodyPr wrap="square">
+            <a:spAutoFit/>
+          </a:bodyPr>
+          <a:lstStyle/>
+          <a:p>
+            <a:pPr algn="ctr">
+              <a:defRPr sz="1000" b="1">
+                <a:solidFill>
+                  <a:srgbClr val="00C864"/>
+                </a:solidFill>
+              </a:defRPr>
+            </a:pPr>
+            <a:r>
+              <a:t>SUPERVISED</a:t>
+            </a:r>
+          </a:p>
+        </p:txBody>
+      </p:sp>
+      <p:sp>
+        <p:nvSpPr>
+          <p:cNvPr id="12" name="TextBox 11"/>
+          <p:cNvSpPr txBox="1"/>
+          <p:nvPr/>
+        </p:nvSpPr>
+        <p:spPr>
+          <a:xfrm>
+            <a:off x="3337560" y="2377440"/>
+            <a:ext cx="2560320" cy="320040"/>
+          </a:xfrm>
+          <a:prstGeom prst="rect">
+            <a:avLst/>
+          </a:prstGeom>
+          <a:noFill/>
+        </p:spPr>
+        <p:txBody>
+          <a:bodyPr wrap="square">
+            <a:spAutoFit/>
+          </a:bodyPr>
+          <a:lstStyle/>
+          <a:p>
+            <a:pPr algn="ctr">
+              <a:defRPr sz="1400" b="1">
+                <a:solidFill>
+                  <a:srgbClr val="FFDC32"/>
+                </a:solidFill>
+              </a:defRPr>
+            </a:pPr>
+            <a:r>
+              <a:t>CNN</a:t>
+            </a:r>
+          </a:p>
+        </p:txBody>
+      </p:sp>
+      <p:sp>
+        <p:nvSpPr>
+          <p:cNvPr id="13" name="TextBox 12"/>
+          <p:cNvSpPr txBox="1"/>
+          <p:nvPr/>
+        </p:nvSpPr>
+        <p:spPr>
+          <a:xfrm>
+            <a:off x="3337560" y="2834639"/>
+            <a:ext cx="2560320" cy="731520"/>
+          </a:xfrm>
+          <a:prstGeom prst="rect">
+            <a:avLst/>
+          </a:prstGeom>
+          <a:noFill/>
+        </p:spPr>
+        <p:txBody>
+          <a:bodyPr wrap="square">
+            <a:spAutoFit/>
+          </a:bodyPr>
+          <a:lstStyle/>
+          <a:p>
+            <a:pPr algn="ctr">
+              <a:defRPr sz="1100" b="0">
+                <a:solidFill>
+                  <a:srgbClr val="C8C8D2"/>
+                </a:solidFill>
+              </a:defRPr>
+            </a:pPr>
+            <a:r>
+              <a:t>Best for</a:t>
+            </a:r>
+            <a:br/>
+            <a:r>
+              <a:t>images</a:t>
+            </a:r>
+          </a:p>
+        </p:txBody>
+      </p:sp>
+      <p:sp>
+        <p:nvSpPr>
+          <p:cNvPr id="14" name="Rectangle 13"/>
+          <p:cNvSpPr/>
+          <p:nvPr/>
+        </p:nvSpPr>
+        <p:spPr>
+          <a:xfrm>
+            <a:off x="6217920" y="1554480"/>
+            <a:ext cx="2743200" cy="2286000"/>
+          </a:xfrm>
+          <a:prstGeom prst="rect">
+            <a:avLst/>
+          </a:prstGeom>
+          <a:solidFill>
+            <a:srgbClr val="2D2D3C"/>
+          </a:solidFill>
+          <a:ln>
+            <a:noFill/>
+          </a:ln>
+        </p:spPr>
+        <p:style>
+          <a:lnRef idx="1">
+            <a:schemeClr val="accent1"/>
+          </a:lnRef>
+          <a:fillRef idx="3">
+            <a:schemeClr val="accent1"/>
+          </a:fillRef>
+          <a:effectRef idx="2">
+            <a:schemeClr val="accent1"/>
+          </a:effectRef>
+          <a:fontRef idx="minor">
+            <a:schemeClr val="lt1"/>
+          </a:fontRef>
+        </p:style>
+        <p:txBody>
+          <a:bodyPr rtlCol="0" anchor="ctr"/>
+          <a:lstStyle/>
+          <a:p>
+            <a:pPr algn="ctr"/>
+          </a:p>
+        </p:txBody>
+      </p:sp>
+      <p:sp>
+        <p:nvSpPr>
+          <p:cNvPr id="15" name="TextBox 14"/>
+          <p:cNvSpPr txBox="1"/>
+          <p:nvPr/>
+        </p:nvSpPr>
+        <p:spPr>
+          <a:xfrm>
+            <a:off x="6309359" y="1645920"/>
+            <a:ext cx="2560320" cy="320040"/>
+          </a:xfrm>
+          <a:prstGeom prst="rect">
+            <a:avLst/>
+          </a:prstGeom>
+          <a:noFill/>
+        </p:spPr>
+        <p:txBody>
+          <a:bodyPr wrap="square">
+            <a:spAutoFit/>
+          </a:bodyPr>
+          <a:lstStyle/>
+          <a:p>
+            <a:pPr algn="ctr">
+              <a:defRPr sz="1200" b="1">
+                <a:solidFill>
+                  <a:srgbClr val="FFFFFF"/>
+                </a:solidFill>
+              </a:defRPr>
+            </a:pPr>
+            <a:r>
+              <a:t>Cheating?</a:t>
+            </a:r>
+          </a:p>
+        </p:txBody>
+      </p:sp>
+      <p:sp>
+        <p:nvSpPr>
+          <p:cNvPr id="16" name="TextBox 15"/>
+          <p:cNvSpPr txBox="1"/>
+          <p:nvPr/>
+        </p:nvSpPr>
+        <p:spPr>
+          <a:xfrm>
+            <a:off x="6309359" y="2011680"/>
+            <a:ext cx="2560320" cy="274320"/>
+          </a:xfrm>
+          <a:prstGeom prst="rect">
+            <a:avLst/>
+          </a:prstGeom>
+          <a:noFill/>
+        </p:spPr>
+        <p:txBody>
+          <a:bodyPr wrap="square">
+            <a:spAutoFit/>
+          </a:bodyPr>
+          <a:lstStyle/>
+          <a:p>
+            <a:pPr algn="ctr">
+              <a:defRPr sz="1000" b="1">
+                <a:solidFill>
+                  <a:srgbClr val="00C864"/>
+                </a:solidFill>
+              </a:defRPr>
+            </a:pPr>
+            <a:r>
+              <a:t>SUPERVISED</a:t>
+            </a:r>
+          </a:p>
+        </p:txBody>
+      </p:sp>
+      <p:sp>
+        <p:nvSpPr>
+          <p:cNvPr id="17" name="TextBox 16"/>
+          <p:cNvSpPr txBox="1"/>
+          <p:nvPr/>
+        </p:nvSpPr>
+        <p:spPr>
+          <a:xfrm>
+            <a:off x="6309359" y="2377440"/>
+            <a:ext cx="2560320" cy="320040"/>
+          </a:xfrm>
+          <a:prstGeom prst="rect">
+            <a:avLst/>
+          </a:prstGeom>
+          <a:noFill/>
+        </p:spPr>
+        <p:txBody>
+          <a:bodyPr wrap="square">
+            <a:spAutoFit/>
+          </a:bodyPr>
+          <a:lstStyle/>
+          <a:p>
+            <a:pPr algn="ctr">
+              <a:defRPr sz="1400" b="1">
+                <a:solidFill>
+                  <a:srgbClr val="FFDC32"/>
+                </a:solidFill>
+              </a:defRPr>
+            </a:pPr>
+            <a:r>
+              <a:t>CNN+LSTM</a:t>
+            </a:r>
+          </a:p>
+        </p:txBody>
+      </p:sp>
+      <p:sp>
+        <p:nvSpPr>
+          <p:cNvPr id="18" name="TextBox 17"/>
+          <p:cNvSpPr txBox="1"/>
+          <p:nvPr/>
+        </p:nvSpPr>
+        <p:spPr>
+          <a:xfrm>
+            <a:off x="6309359" y="2834639"/>
+            <a:ext cx="2560320" cy="731520"/>
+          </a:xfrm>
+          <a:prstGeom prst="rect">
+            <a:avLst/>
+          </a:prstGeom>
+          <a:noFill/>
+        </p:spPr>
+        <p:txBody>
+          <a:bodyPr wrap="square">
+            <a:spAutoFit/>
+          </a:bodyPr>
+          <a:lstStyle/>
+          <a:p>
+            <a:pPr algn="ctr">
+              <a:defRPr sz="1100" b="0">
+                <a:solidFill>
+                  <a:srgbClr val="C8C8D2"/>
+                </a:solidFill>
+              </a:defRPr>
+            </a:pPr>
+            <a:r>
+              <a:t>Frames +</a:t>
+            </a:r>
+            <a:br/>
+            <a:r>
+              <a:t>time sequence</a:t>
+            </a:r>
+          </a:p>
+        </p:txBody>
+      </p:sp>
+      <p:sp>
+        <p:nvSpPr>
+          <p:cNvPr id="19" name="Rectangle 18"/>
+          <p:cNvSpPr/>
+          <p:nvPr/>
+        </p:nvSpPr>
+        <p:spPr>
+          <a:xfrm>
+            <a:off x="9189720" y="1554480"/>
+            <a:ext cx="2743200" cy="2286000"/>
+          </a:xfrm>
+          <a:prstGeom prst="rect">
+            <a:avLst/>
+          </a:prstGeom>
+          <a:solidFill>
+            <a:srgbClr val="2D2D3C"/>
+          </a:solidFill>
+          <a:ln>
+            <a:noFill/>
+          </a:ln>
+        </p:spPr>
+        <p:style>
+          <a:lnRef idx="1">
+            <a:schemeClr val="accent1"/>
+          </a:lnRef>
+          <a:fillRef idx="3">
+            <a:schemeClr val="accent1"/>
+          </a:fillRef>
+          <a:effectRef idx="2">
+            <a:schemeClr val="accent1"/>
+          </a:effectRef>
+          <a:fontRef idx="minor">
+            <a:schemeClr val="lt1"/>
+          </a:fontRef>
+        </p:style>
+        <p:txBody>
+          <a:bodyPr rtlCol="0" anchor="ctr"/>
+          <a:lstStyle/>
+          <a:p>
+            <a:pPr algn="ctr"/>
+          </a:p>
+        </p:txBody>
+      </p:sp>
+      <p:sp>
+        <p:nvSpPr>
+          <p:cNvPr id="20" name="TextBox 19"/>
+          <p:cNvSpPr txBox="1"/>
+          <p:nvPr/>
+        </p:nvSpPr>
+        <p:spPr>
+          <a:xfrm>
+            <a:off x="9281160" y="1645920"/>
+            <a:ext cx="2560320" cy="320040"/>
+          </a:xfrm>
+          <a:prstGeom prst="rect">
+            <a:avLst/>
+          </a:prstGeom>
+          <a:noFill/>
+        </p:spPr>
+        <p:txBody>
+          <a:bodyPr wrap="square">
+            <a:spAutoFit/>
+          </a:bodyPr>
+          <a:lstStyle/>
+          <a:p>
+            <a:pPr algn="ctr">
+              <a:defRPr sz="1200" b="1">
+                <a:solidFill>
+                  <a:srgbClr val="FFFFFF"/>
+                </a:solidFill>
+              </a:defRPr>
+            </a:pPr>
+            <a:r>
+              <a:t>Unusual?</a:t>
+            </a:r>
+          </a:p>
+        </p:txBody>
+      </p:sp>
+      <p:sp>
+        <p:nvSpPr>
+          <p:cNvPr id="21" name="TextBox 20"/>
+          <p:cNvSpPr txBox="1"/>
+          <p:nvPr/>
+        </p:nvSpPr>
+        <p:spPr>
+          <a:xfrm>
+            <a:off x="9281160" y="2011680"/>
+            <a:ext cx="2560320" cy="274320"/>
+          </a:xfrm>
+          <a:prstGeom prst="rect">
+            <a:avLst/>
+          </a:prstGeom>
+          <a:noFill/>
+        </p:spPr>
+        <p:txBody>
+          <a:bodyPr wrap="square">
+            <a:spAutoFit/>
+          </a:bodyPr>
+          <a:lstStyle/>
+          <a:p>
+            <a:pPr algn="ctr">
+              <a:defRPr sz="1000" b="1">
+                <a:solidFill>
+                  <a:srgbClr val="B464FF"/>
+                </a:solidFill>
+              </a:defRPr>
+            </a:pPr>
+            <a:r>
+              <a:t>UNSUPERVISED</a:t>
+            </a:r>
+          </a:p>
+        </p:txBody>
+      </p:sp>
+      <p:sp>
+        <p:nvSpPr>
+          <p:cNvPr id="22" name="TextBox 21"/>
+          <p:cNvSpPr txBox="1"/>
+          <p:nvPr/>
+        </p:nvSpPr>
+        <p:spPr>
+          <a:xfrm>
+            <a:off x="9281160" y="2377440"/>
+            <a:ext cx="2560320" cy="320040"/>
+          </a:xfrm>
+          <a:prstGeom prst="rect">
+            <a:avLst/>
+          </a:prstGeom>
+          <a:noFill/>
+        </p:spPr>
+        <p:txBody>
+          <a:bodyPr wrap="square">
+            <a:spAutoFit/>
+          </a:bodyPr>
+          <a:lstStyle/>
+          <a:p>
+            <a:pPr algn="ctr">
+              <a:defRPr sz="1400" b="1">
+                <a:solidFill>
+                  <a:srgbClr val="FFDC32"/>
+                </a:solidFill>
+              </a:defRPr>
+            </a:pPr>
+            <a:r>
+              <a:t>Autoencoder</a:t>
+            </a:r>
+          </a:p>
+        </p:txBody>
+      </p:sp>
+      <p:sp>
+        <p:nvSpPr>
+          <p:cNvPr id="23" name="TextBox 22"/>
+          <p:cNvSpPr txBox="1"/>
+          <p:nvPr/>
+        </p:nvSpPr>
+        <p:spPr>
+          <a:xfrm>
+            <a:off x="9281160" y="2834639"/>
+            <a:ext cx="2560320" cy="731520"/>
+          </a:xfrm>
+          <a:prstGeom prst="rect">
+            <a:avLst/>
+          </a:prstGeom>
+          <a:noFill/>
+        </p:spPr>
+        <p:txBody>
+          <a:bodyPr wrap="square">
+            <a:spAutoFit/>
+          </a:bodyPr>
+          <a:lstStyle/>
+          <a:p>
+            <a:pPr algn="ctr">
+              <a:defRPr sz="1100" b="0">
+                <a:solidFill>
+                  <a:srgbClr val="C8C8D2"/>
+                </a:solidFill>
+              </a:defRPr>
+            </a:pPr>
+            <a:r>
+              <a:t>Learns normal</a:t>
+            </a:r>
+            <a:br/>
+            <a:r>
+              <a:t>flags rest</a:t>
+            </a:r>
+          </a:p>
+        </p:txBody>
+      </p:sp>
+      <p:sp>
+        <p:nvSpPr>
+          <p:cNvPr id="24" name="Rectangle 23"/>
+          <p:cNvSpPr/>
+          <p:nvPr/>
+        </p:nvSpPr>
+        <p:spPr>
+          <a:xfrm>
+            <a:off x="274320" y="4114800"/>
+            <a:ext cx="2743200" cy="2286000"/>
+          </a:xfrm>
+          <a:prstGeom prst="rect">
+            <a:avLst/>
+          </a:prstGeom>
+          <a:solidFill>
+            <a:srgbClr val="2D2D3C"/>
+          </a:solidFill>
+          <a:ln>
+            <a:noFill/>
+          </a:ln>
+        </p:spPr>
+        <p:style>
+          <a:lnRef idx="1">
+            <a:schemeClr val="accent1"/>
+          </a:lnRef>
+          <a:fillRef idx="3">
+            <a:schemeClr val="accent1"/>
+          </a:fillRef>
+          <a:effectRef idx="2">
+            <a:schemeClr val="accent1"/>
+          </a:effectRef>
+          <a:fontRef idx="minor">
+            <a:schemeClr val="lt1"/>
+          </a:fontRef>
+        </p:style>
+        <p:txBody>
+          <a:bodyPr rtlCol="0" anchor="ctr"/>
+          <a:lstStyle/>
+          <a:p>
+            <a:pPr algn="ctr"/>
+          </a:p>
+        </p:txBody>
+      </p:sp>
+      <p:sp>
+        <p:nvSpPr>
+          <p:cNvPr id="25" name="TextBox 24"/>
+          <p:cNvSpPr txBox="1"/>
+          <p:nvPr/>
+        </p:nvSpPr>
+        <p:spPr>
+          <a:xfrm>
+            <a:off x="365760" y="4206240"/>
+            <a:ext cx="2560320" cy="320040"/>
+          </a:xfrm>
+          <a:prstGeom prst="rect">
+            <a:avLst/>
+          </a:prstGeom>
+          <a:noFill/>
+        </p:spPr>
+        <p:txBody>
+          <a:bodyPr wrap="square">
+            <a:spAutoFit/>
+          </a:bodyPr>
+          <a:lstStyle/>
+          <a:p>
+            <a:pPr algn="ctr">
+              <a:defRPr sz="1200" b="1">
+                <a:solidFill>
+                  <a:srgbClr val="FFFFFF"/>
+                </a:solidFill>
+              </a:defRPr>
+            </a:pPr>
+            <a:r>
+              <a:t>Group Behavior</a:t>
+            </a:r>
+          </a:p>
+        </p:txBody>
+      </p:sp>
+      <p:sp>
+        <p:nvSpPr>
+          <p:cNvPr id="26" name="TextBox 25"/>
+          <p:cNvSpPr txBox="1"/>
+          <p:nvPr/>
+        </p:nvSpPr>
+        <p:spPr>
+          <a:xfrm>
+            <a:off x="365760" y="4572000"/>
+            <a:ext cx="2560320" cy="274320"/>
+          </a:xfrm>
+          <a:prstGeom prst="rect">
+            <a:avLst/>
+          </a:prstGeom>
+          <a:noFill/>
+        </p:spPr>
+        <p:txBody>
+          <a:bodyPr wrap="square">
+            <a:spAutoFit/>
+          </a:bodyPr>
+          <a:lstStyle/>
+          <a:p>
+            <a:pPr algn="ctr">
+              <a:defRPr sz="1000" b="1">
+                <a:solidFill>
+                  <a:srgbClr val="B464FF"/>
+                </a:solidFill>
+              </a:defRPr>
+            </a:pPr>
+            <a:r>
+              <a:t>UNSUPERVISED</a:t>
+            </a:r>
+          </a:p>
+        </p:txBody>
+      </p:sp>
+      <p:sp>
+        <p:nvSpPr>
+          <p:cNvPr id="27" name="TextBox 26"/>
+          <p:cNvSpPr txBox="1"/>
+          <p:nvPr/>
+        </p:nvSpPr>
+        <p:spPr>
+          <a:xfrm>
+            <a:off x="365760" y="4937760"/>
+            <a:ext cx="2560320" cy="320040"/>
+          </a:xfrm>
+          <a:prstGeom prst="rect">
+            <a:avLst/>
+          </a:prstGeom>
+          <a:noFill/>
+        </p:spPr>
+        <p:txBody>
+          <a:bodyPr wrap="square">
+            <a:spAutoFit/>
+          </a:bodyPr>
+          <a:lstStyle/>
+          <a:p>
+            <a:pPr algn="ctr">
+              <a:defRPr sz="1400" b="1">
+                <a:solidFill>
+                  <a:srgbClr val="FFDC32"/>
+                </a:solidFill>
+              </a:defRPr>
+            </a:pPr>
+            <a:r>
+              <a:t>K-Means</a:t>
+            </a:r>
+          </a:p>
+        </p:txBody>
+      </p:sp>
+      <p:sp>
+        <p:nvSpPr>
+          <p:cNvPr id="28" name="TextBox 27"/>
+          <p:cNvSpPr txBox="1"/>
+          <p:nvPr/>
+        </p:nvSpPr>
+        <p:spPr>
+          <a:xfrm>
+            <a:off x="365760" y="5394960"/>
+            <a:ext cx="2560320" cy="731520"/>
+          </a:xfrm>
+          <a:prstGeom prst="rect">
+            <a:avLst/>
+          </a:prstGeom>
+          <a:noFill/>
+        </p:spPr>
+        <p:txBody>
+          <a:bodyPr wrap="square">
+            <a:spAutoFit/>
+          </a:bodyPr>
+          <a:lstStyle/>
+          <a:p>
+            <a:pPr algn="ctr">
+              <a:defRPr sz="1100" b="0">
+                <a:solidFill>
+                  <a:srgbClr val="C8C8D2"/>
+                </a:solidFill>
+              </a:defRPr>
+            </a:pPr>
+            <a:r>
+              <a:t>Simple</a:t>
+            </a:r>
+            <a:br/>
+            <a:r>
+              <a:t>proven</a:t>
+            </a:r>
+          </a:p>
+        </p:txBody>
+      </p:sp>
+      <p:sp>
+        <p:nvSpPr>
+          <p:cNvPr id="29" name="Rectangle 28"/>
+          <p:cNvSpPr/>
+          <p:nvPr/>
+        </p:nvSpPr>
+        <p:spPr>
+          <a:xfrm>
+            <a:off x="3246120" y="4114800"/>
+            <a:ext cx="2743200" cy="2286000"/>
+          </a:xfrm>
+          <a:prstGeom prst="rect">
+            <a:avLst/>
+          </a:prstGeom>
+          <a:solidFill>
+            <a:srgbClr val="2D2D3C"/>
+          </a:solidFill>
+          <a:ln>
+            <a:noFill/>
+          </a:ln>
+        </p:spPr>
+        <p:style>
+          <a:lnRef idx="1">
+            <a:schemeClr val="accent1"/>
+          </a:lnRef>
+          <a:fillRef idx="3">
+            <a:schemeClr val="accent1"/>
+          </a:fillRef>
+          <a:effectRef idx="2">
+            <a:schemeClr val="accent1"/>
+          </a:effectRef>
+          <a:fontRef idx="minor">
+            <a:schemeClr val="lt1"/>
+          </a:fontRef>
+        </p:style>
+        <p:txBody>
+          <a:bodyPr rtlCol="0" anchor="ctr"/>
+          <a:lstStyle/>
+          <a:p>
+            <a:pPr algn="ctr"/>
+          </a:p>
+        </p:txBody>
+      </p:sp>
+      <p:sp>
+        <p:nvSpPr>
+          <p:cNvPr id="30" name="TextBox 29"/>
+          <p:cNvSpPr txBox="1"/>
+          <p:nvPr/>
+        </p:nvSpPr>
+        <p:spPr>
+          <a:xfrm>
+            <a:off x="3337560" y="4206240"/>
+            <a:ext cx="2560320" cy="320040"/>
+          </a:xfrm>
+          <a:prstGeom prst="rect">
+            <a:avLst/>
+          </a:prstGeom>
+          <a:noFill/>
+        </p:spPr>
+        <p:txBody>
+          <a:bodyPr wrap="square">
+            <a:spAutoFit/>
+          </a:bodyPr>
+          <a:lstStyle/>
+          <a:p>
+            <a:pPr algn="ctr">
+              <a:defRPr sz="1200" b="1">
+                <a:solidFill>
+                  <a:srgbClr val="FFFFFF"/>
+                </a:solidFill>
+              </a:defRPr>
+            </a:pPr>
+            <a:r>
+              <a:t>When Alert?</a:t>
+            </a:r>
+          </a:p>
+        </p:txBody>
+      </p:sp>
+      <p:sp>
+        <p:nvSpPr>
+          <p:cNvPr id="31" name="TextBox 30"/>
+          <p:cNvSpPr txBox="1"/>
+          <p:nvPr/>
+        </p:nvSpPr>
+        <p:spPr>
+          <a:xfrm>
+            <a:off x="3337560" y="4572000"/>
+            <a:ext cx="2560320" cy="274320"/>
+          </a:xfrm>
+          <a:prstGeom prst="rect">
+            <a:avLst/>
+          </a:prstGeom>
+          <a:noFill/>
+        </p:spPr>
+        <p:txBody>
+          <a:bodyPr wrap="square">
+            <a:spAutoFit/>
+          </a:bodyPr>
+          <a:lstStyle/>
+          <a:p>
+            <a:pPr algn="ctr">
+              <a:defRPr sz="1000" b="1">
+                <a:solidFill>
+                  <a:srgbClr val="FFA500"/>
+                </a:solidFill>
+              </a:defRPr>
+            </a:pPr>
+            <a:r>
+              <a:t>RL</a:t>
+            </a:r>
+          </a:p>
+        </p:txBody>
+      </p:sp>
+      <p:sp>
+        <p:nvSpPr>
+          <p:cNvPr id="32" name="TextBox 31"/>
+          <p:cNvSpPr txBox="1"/>
+          <p:nvPr/>
+        </p:nvSpPr>
+        <p:spPr>
+          <a:xfrm>
+            <a:off x="3337560" y="4937760"/>
+            <a:ext cx="2560320" cy="320040"/>
+          </a:xfrm>
+          <a:prstGeom prst="rect">
+            <a:avLst/>
+          </a:prstGeom>
+          <a:noFill/>
+        </p:spPr>
+        <p:txBody>
+          <a:bodyPr wrap="square">
+            <a:spAutoFit/>
+          </a:bodyPr>
+          <a:lstStyle/>
+          <a:p>
+            <a:pPr algn="ctr">
+              <a:defRPr sz="1400" b="1">
+                <a:solidFill>
+                  <a:srgbClr val="FFDC32"/>
+                </a:solidFill>
+              </a:defRPr>
+            </a:pPr>
+            <a:r>
+              <a:t>Custom RL</a:t>
+            </a:r>
+          </a:p>
+        </p:txBody>
+      </p:sp>
+      <p:sp>
+        <p:nvSpPr>
+          <p:cNvPr id="33" name="TextBox 32"/>
+          <p:cNvSpPr txBox="1"/>
+          <p:nvPr/>
+        </p:nvSpPr>
+        <p:spPr>
+          <a:xfrm>
+            <a:off x="3337560" y="5394960"/>
+            <a:ext cx="2560320" cy="731520"/>
+          </a:xfrm>
+          <a:prstGeom prst="rect">
+            <a:avLst/>
+          </a:prstGeom>
+          <a:noFill/>
+        </p:spPr>
+        <p:txBody>
+          <a:bodyPr wrap="square">
+            <a:spAutoFit/>
+          </a:bodyPr>
+          <a:lstStyle/>
+          <a:p>
+            <a:pPr algn="ctr">
+              <a:defRPr sz="1100" b="0">
+                <a:solidFill>
+                  <a:srgbClr val="C8C8D2"/>
+                </a:solidFill>
+              </a:defRPr>
+            </a:pPr>
+            <a:r>
+              <a:t>Balance alert</a:t>
+            </a:r>
+            <a:br/>
+            <a:r>
+              <a:t>vs ignore</a:t>
+            </a:r>
+          </a:p>
+        </p:txBody>
+      </p:sp>
+      <p:sp>
+        <p:nvSpPr>
+          <p:cNvPr id="34" name="Rectangle 33"/>
+          <p:cNvSpPr/>
+          <p:nvPr/>
+        </p:nvSpPr>
+        <p:spPr>
+          <a:xfrm>
+            <a:off x="6217920" y="4114800"/>
+            <a:ext cx="2743200" cy="2286000"/>
+          </a:xfrm>
+          <a:prstGeom prst="rect">
+            <a:avLst/>
+          </a:prstGeom>
+          <a:solidFill>
+            <a:srgbClr val="2D2D3C"/>
+          </a:solidFill>
+          <a:ln>
+            <a:noFill/>
+          </a:ln>
+        </p:spPr>
+        <p:style>
+          <a:lnRef idx="1">
+            <a:schemeClr val="accent1"/>
+          </a:lnRef>
+          <a:fillRef idx="3">
+            <a:schemeClr val="accent1"/>
+          </a:fillRef>
+          <a:effectRef idx="2">
+            <a:schemeClr val="accent1"/>
+          </a:effectRef>
+          <a:fontRef idx="minor">
+            <a:schemeClr val="lt1"/>
+          </a:fontRef>
+        </p:style>
+        <p:txBody>
+          <a:bodyPr rtlCol="0" anchor="ctr"/>
+          <a:lstStyle/>
+          <a:p>
+            <a:pPr algn="ctr"/>
+          </a:p>
+        </p:txBody>
+      </p:sp>
+      <p:sp>
+        <p:nvSpPr>
+          <p:cNvPr id="35" name="TextBox 34"/>
+          <p:cNvSpPr txBox="1"/>
+          <p:nvPr/>
+        </p:nvSpPr>
+        <p:spPr>
+          <a:xfrm>
+            <a:off x="6309359" y="4206240"/>
+            <a:ext cx="2560320" cy="320040"/>
+          </a:xfrm>
+          <a:prstGeom prst="rect">
+            <a:avLst/>
+          </a:prstGeom>
+          <a:noFill/>
+        </p:spPr>
+        <p:txBody>
+          <a:bodyPr wrap="square">
+            <a:spAutoFit/>
+          </a:bodyPr>
+          <a:lstStyle/>
+          <a:p>
+            <a:pPr algn="ctr">
+              <a:defRPr sz="1200" b="1">
+                <a:solidFill>
+                  <a:srgbClr val="FFFFFF"/>
+                </a:solidFill>
+              </a:defRPr>
+            </a:pPr>
+            <a:r>
+              <a:t>Track Person</a:t>
+            </a:r>
+          </a:p>
+        </p:txBody>
+      </p:sp>
+      <p:sp>
+        <p:nvSpPr>
+          <p:cNvPr id="36" name="TextBox 35"/>
+          <p:cNvSpPr txBox="1"/>
+          <p:nvPr/>
+        </p:nvSpPr>
+        <p:spPr>
+          <a:xfrm>
+            <a:off x="6309359" y="4572000"/>
+            <a:ext cx="2560320" cy="274320"/>
+          </a:xfrm>
+          <a:prstGeom prst="rect">
+            <a:avLst/>
+          </a:prstGeom>
+          <a:noFill/>
+        </p:spPr>
+        <p:txBody>
+          <a:bodyPr wrap="square">
+            <a:spAutoFit/>
+          </a:bodyPr>
+          <a:lstStyle/>
+          <a:p>
+            <a:pPr algn="ctr">
+              <a:defRPr sz="1000" b="1">
+                <a:solidFill>
+                  <a:srgbClr val="FF5050"/>
+                </a:solidFill>
+              </a:defRPr>
+            </a:pPr>
+            <a:r>
+              <a:t>DEEP LEARNING</a:t>
+            </a:r>
+          </a:p>
+        </p:txBody>
+      </p:sp>
+      <p:sp>
+        <p:nvSpPr>
+          <p:cNvPr id="37" name="TextBox 36"/>
+          <p:cNvSpPr txBox="1"/>
+          <p:nvPr/>
+        </p:nvSpPr>
+        <p:spPr>
+          <a:xfrm>
+            <a:off x="6309359" y="4937760"/>
+            <a:ext cx="2560320" cy="320040"/>
+          </a:xfrm>
+          <a:prstGeom prst="rect">
+            <a:avLst/>
+          </a:prstGeom>
+          <a:noFill/>
+        </p:spPr>
+        <p:txBody>
+          <a:bodyPr wrap="square">
+            <a:spAutoFit/>
+          </a:bodyPr>
+          <a:lstStyle/>
+          <a:p>
+            <a:pPr algn="ctr">
+              <a:defRPr sz="1400" b="1">
+                <a:solidFill>
+                  <a:srgbClr val="FFDC32"/>
+                </a:solidFill>
+              </a:defRPr>
+            </a:pPr>
+            <a:r>
+              <a:t>Re-ID Net</a:t>
+            </a:r>
+          </a:p>
+        </p:txBody>
+      </p:sp>
+      <p:sp>
+        <p:nvSpPr>
+          <p:cNvPr id="38" name="TextBox 37"/>
+          <p:cNvSpPr txBox="1"/>
+          <p:nvPr/>
+        </p:nvSpPr>
+        <p:spPr>
+          <a:xfrm>
+            <a:off x="6309359" y="5394960"/>
+            <a:ext cx="2560320" cy="731520"/>
+          </a:xfrm>
+          <a:prstGeom prst="rect">
+            <a:avLst/>
+          </a:prstGeom>
+          <a:noFill/>
+        </p:spPr>
+        <p:txBody>
+          <a:bodyPr wrap="square">
+            <a:spAutoFit/>
+          </a:bodyPr>
+          <a:lstStyle/>
+          <a:p>
+            <a:pPr algn="ctr">
+              <a:defRPr sz="1100" b="0">
+                <a:solidFill>
+                  <a:srgbClr val="C8C8D2"/>
+                </a:solidFill>
+              </a:defRPr>
+            </a:pPr>
+            <a:r>
+              <a:t>Match across</a:t>
+            </a:r>
+            <a:br/>
+            <a:r>
+              <a:t>cameras</a:t>
             </a:r>
           </a:p>
         </p:txBody>
